--- a/DRI_Dashboard_Overview.pptx
+++ b/DRI_Dashboard_Overview.pptx
@@ -17,11 +17,9 @@
     <p:sldId id="265" r:id="rId11"/>
     <p:sldId id="266" r:id="rId12"/>
     <p:sldId id="267" r:id="rId13"/>
-    <p:sldId id="268" r:id="rId14"/>
-    <p:sldId id="269" r:id="rId15"/>
   </p:sldIdLst>
   <p:notesMasterIdLst>
-    <p:notesMasterId r:id="rId16"/>
+    <p:notesMasterId r:id="rId14"/>
   </p:notesMasterIdLst>
   <p:sldSz cx="12191695" cy="6858000"/>
   <p:notesSz cx="6858000" cy="12191695"/>
@@ -803,182 +801,6 @@
             <a:fld id="{F7021451-1387-4CA6-816F-3879F97B5CBC}" type="slidenum">
               <a:rPr lang="en-US"/>
               <a:t>12</a:t>
-            </a:fld>
-            <a:endParaRPr lang="en-US"/>
-          </a:p>
-        </p:txBody>
-      </p:sp>
-    </p:spTree>
-    <p:extLst>
-      <p:ext uri="{BB962C8B-B14F-4D97-AF65-F5344CB8AC3E}">
-        <p14:creationId xmlns:p14="http://schemas.microsoft.com/office/powerpoint/2010/main" val="1024086991"/>
-      </p:ext>
-    </p:extLst>
-  </p:cSld>
-  <p:clrMapOvr>
-    <a:masterClrMapping/>
-  </p:clrMapOvr>
-</p:notes>
-</file>
-
-<file path=ppt/notesSlides/notesSlide13.xml><?xml version="1.0" encoding="utf-8"?>
-<p:notes xmlns:a="http://schemas.openxmlformats.org/drawingml/2006/main" xmlns:r="http://schemas.openxmlformats.org/officeDocument/2006/relationships" xmlns:p="http://schemas.openxmlformats.org/presentationml/2006/main">
-  <p:cSld>
-    <p:spTree>
-      <p:nvGrpSpPr>
-        <p:cNvPr id="1" name=""/>
-        <p:cNvGrpSpPr/>
-        <p:nvPr/>
-      </p:nvGrpSpPr>
-      <p:grpSpPr>
-        <a:xfrm>
-          <a:off x="0" y="0"/>
-          <a:ext cx="0" cy="0"/>
-          <a:chOff x="0" y="0"/>
-          <a:chExt cx="0" cy="0"/>
-        </a:xfrm>
-      </p:grpSpPr>
-      <p:sp>
-        <p:nvSpPr>
-          <p:cNvPr id="2" name="Slide Image Placeholder 1"/>
-          <p:cNvSpPr>
-            <a:spLocks noGrp="1" noRot="1" noChangeAspect="1"/>
-          </p:cNvSpPr>
-          <p:nvPr>
-            <p:ph type="sldImg"/>
-          </p:nvPr>
-        </p:nvSpPr>
-        <p:spPr/>
-      </p:sp>
-      <p:sp>
-        <p:nvSpPr>
-          <p:cNvPr id="3" name="Notes Placeholder 2"/>
-          <p:cNvSpPr>
-            <a:spLocks noGrp="1"/>
-          </p:cNvSpPr>
-          <p:nvPr>
-            <p:ph type="body" idx="1"/>
-          </p:nvPr>
-        </p:nvSpPr>
-        <p:spPr/>
-        <p:txBody>
-          <a:bodyPr/>
-          <a:lstStyle/>
-          <a:p>
-            <a:r>
-              <a:rPr lang="en-US" dirty="0"/>
-              <a:t/>
-            </a:r>
-            <a:endParaRPr lang="en-US" dirty="0"/>
-          </a:p>
-        </p:txBody>
-      </p:sp>
-      <p:sp>
-        <p:nvSpPr>
-          <p:cNvPr id="4" name="Slide Number Placeholder 3"/>
-          <p:cNvSpPr>
-            <a:spLocks noGrp="1"/>
-          </p:cNvSpPr>
-          <p:nvPr>
-            <p:ph type="sldNum" sz="quarter" idx="10"/>
-          </p:nvPr>
-        </p:nvSpPr>
-        <p:spPr/>
-        <p:txBody>
-          <a:bodyPr/>
-          <a:lstStyle/>
-          <a:p>
-            <a:fld id="{F7021451-1387-4CA6-816F-3879F97B5CBC}" type="slidenum">
-              <a:rPr lang="en-US"/>
-              <a:t>13</a:t>
-            </a:fld>
-            <a:endParaRPr lang="en-US"/>
-          </a:p>
-        </p:txBody>
-      </p:sp>
-    </p:spTree>
-    <p:extLst>
-      <p:ext uri="{BB962C8B-B14F-4D97-AF65-F5344CB8AC3E}">
-        <p14:creationId xmlns:p14="http://schemas.microsoft.com/office/powerpoint/2010/main" val="1024086991"/>
-      </p:ext>
-    </p:extLst>
-  </p:cSld>
-  <p:clrMapOvr>
-    <a:masterClrMapping/>
-  </p:clrMapOvr>
-</p:notes>
-</file>
-
-<file path=ppt/notesSlides/notesSlide14.xml><?xml version="1.0" encoding="utf-8"?>
-<p:notes xmlns:a="http://schemas.openxmlformats.org/drawingml/2006/main" xmlns:r="http://schemas.openxmlformats.org/officeDocument/2006/relationships" xmlns:p="http://schemas.openxmlformats.org/presentationml/2006/main">
-  <p:cSld>
-    <p:spTree>
-      <p:nvGrpSpPr>
-        <p:cNvPr id="1" name=""/>
-        <p:cNvGrpSpPr/>
-        <p:nvPr/>
-      </p:nvGrpSpPr>
-      <p:grpSpPr>
-        <a:xfrm>
-          <a:off x="0" y="0"/>
-          <a:ext cx="0" cy="0"/>
-          <a:chOff x="0" y="0"/>
-          <a:chExt cx="0" cy="0"/>
-        </a:xfrm>
-      </p:grpSpPr>
-      <p:sp>
-        <p:nvSpPr>
-          <p:cNvPr id="2" name="Slide Image Placeholder 1"/>
-          <p:cNvSpPr>
-            <a:spLocks noGrp="1" noRot="1" noChangeAspect="1"/>
-          </p:cNvSpPr>
-          <p:nvPr>
-            <p:ph type="sldImg"/>
-          </p:nvPr>
-        </p:nvSpPr>
-        <p:spPr/>
-      </p:sp>
-      <p:sp>
-        <p:nvSpPr>
-          <p:cNvPr id="3" name="Notes Placeholder 2"/>
-          <p:cNvSpPr>
-            <a:spLocks noGrp="1"/>
-          </p:cNvSpPr>
-          <p:nvPr>
-            <p:ph type="body" idx="1"/>
-          </p:nvPr>
-        </p:nvSpPr>
-        <p:spPr/>
-        <p:txBody>
-          <a:bodyPr/>
-          <a:lstStyle/>
-          <a:p>
-            <a:r>
-              <a:rPr lang="en-US" dirty="0"/>
-              <a:t/>
-            </a:r>
-            <a:endParaRPr lang="en-US" dirty="0"/>
-          </a:p>
-        </p:txBody>
-      </p:sp>
-      <p:sp>
-        <p:nvSpPr>
-          <p:cNvPr id="4" name="Slide Number Placeholder 3"/>
-          <p:cNvSpPr>
-            <a:spLocks noGrp="1"/>
-          </p:cNvSpPr>
-          <p:nvPr>
-            <p:ph type="sldNum" sz="quarter" idx="10"/>
-          </p:nvPr>
-        </p:nvSpPr>
-        <p:spPr/>
-        <p:txBody>
-          <a:bodyPr/>
-          <a:lstStyle/>
-          <a:p>
-            <a:fld id="{F7021451-1387-4CA6-816F-3879F97B5CBC}" type="slidenum">
-              <a:rPr lang="en-US"/>
-              <a:t>14</a:t>
             </a:fld>
             <a:endParaRPr lang="en-US"/>
           </a:p>
@@ -2263,7 +2085,7 @@
                 <a:ea typeface="Segoe UI" pitchFamily="34" charset="-122"/>
                 <a:cs typeface="Segoe UI" pitchFamily="34" charset="-120"/>
               </a:rPr>
-              <a:t>How Site DRIs track daily work, log progress, and request drawings — end to end.</a:t>
+              <a:t>How Site DRIs log daily reports and request drawings — end to end.</a:t>
             </a:r>
             <a:endParaRPr lang="en-US" sz="1500" dirty="0"/>
           </a:p>
@@ -2286,7 +2108,7 @@
             </a:avLst>
           </a:prstGeom>
           <a:solidFill>
-            <a:srgbClr val="FF7A00"/>
+            <a:srgbClr val="4F46E5"/>
           </a:solidFill>
           <a:ln/>
         </p:spPr>
@@ -2324,7 +2146,7 @@
                 <a:ea typeface="Segoe UI" pitchFamily="34" charset="-122"/>
                 <a:cs typeface="Segoe UI" pitchFamily="34" charset="-120"/>
               </a:rPr>
-              <a:t>Project Wise Progress</a:t>
+              <a:t>Daily Progress Report</a:t>
             </a:r>
             <a:endParaRPr lang="en-US" sz="1250" dirty="0"/>
           </a:p>
@@ -2339,7 +2161,7 @@
         <p:spPr>
           <a:xfrm>
             <a:off x="3552444" y="5029200"/>
-            <a:ext cx="2528316" cy="457200"/>
+            <a:ext cx="2002536" cy="457200"/>
           </a:xfrm>
           <a:prstGeom prst="roundRect">
             <a:avLst>
@@ -2347,67 +2169,6 @@
             </a:avLst>
           </a:prstGeom>
           <a:solidFill>
-            <a:srgbClr val="4F46E5"/>
-          </a:solidFill>
-          <a:ln/>
-        </p:spPr>
-      </p:sp>
-      <p:sp>
-        <p:nvSpPr>
-          <p:cNvPr id="12" name="Text 10"/>
-          <p:cNvSpPr/>
-          <p:nvPr/>
-        </p:nvSpPr>
-        <p:spPr>
-          <a:xfrm>
-            <a:off x="3552444" y="5029200"/>
-            <a:ext cx="2528316" cy="457200"/>
-          </a:xfrm>
-          <a:prstGeom prst="rect">
-            <a:avLst/>
-          </a:prstGeom>
-          <a:noFill/>
-          <a:ln/>
-        </p:spPr>
-        <p:txBody>
-          <a:bodyPr wrap="square" rtlCol="0" anchor="ctr"/>
-          <a:lstStyle/>
-          <a:p>
-            <a:pPr algn="ctr" indent="0" marL="0">
-              <a:buNone/>
-            </a:pPr>
-            <a:r>
-              <a:rPr lang="en-US" sz="1250" b="1" dirty="0">
-                <a:solidFill>
-                  <a:srgbClr val="FFFFFF"/>
-                </a:solidFill>
-                <a:latin typeface="Segoe UI" pitchFamily="34" charset="0"/>
-                <a:ea typeface="Segoe UI" pitchFamily="34" charset="-122"/>
-                <a:cs typeface="Segoe UI" pitchFamily="34" charset="-120"/>
-              </a:rPr>
-              <a:t>Daily Progress Report</a:t>
-            </a:r>
-            <a:endParaRPr lang="en-US" sz="1250" dirty="0"/>
-          </a:p>
-        </p:txBody>
-      </p:sp>
-      <p:sp>
-        <p:nvSpPr>
-          <p:cNvPr id="13" name="Shape 11"/>
-          <p:cNvSpPr/>
-          <p:nvPr/>
-        </p:nvSpPr>
-        <p:spPr>
-          <a:xfrm>
-            <a:off x="6281928" y="5029200"/>
-            <a:ext cx="2002536" cy="457200"/>
-          </a:xfrm>
-          <a:prstGeom prst="roundRect">
-            <a:avLst>
-              <a:gd name="adj" fmla="val 50000"/>
-            </a:avLst>
-          </a:prstGeom>
-          <a:solidFill>
             <a:srgbClr val="7C3AED"/>
           </a:solidFill>
           <a:ln/>
@@ -2415,13 +2176,13 @@
       </p:sp>
       <p:sp>
         <p:nvSpPr>
-          <p:cNvPr id="14" name="Text 12"/>
-          <p:cNvSpPr/>
-          <p:nvPr/>
-        </p:nvSpPr>
-        <p:spPr>
-          <a:xfrm>
-            <a:off x="6281928" y="5029200"/>
+          <p:cNvPr id="12" name="Text 10"/>
+          <p:cNvSpPr/>
+          <p:nvPr/>
+        </p:nvSpPr>
+        <p:spPr>
+          <a:xfrm>
+            <a:off x="3552444" y="5029200"/>
             <a:ext cx="2002536" cy="457200"/>
           </a:xfrm>
           <a:prstGeom prst="rect">
@@ -2466,7 +2227,7 @@
     <p:bg>
       <p:bgPr>
         <a:solidFill>
-          <a:srgbClr val="7C3AED"/>
+          <a:srgbClr val="FFFFFF"/>
         </a:solidFill>
       </p:bgPr>
     </p:bg>
@@ -2486,44 +2247,23 @@
       </p:grpSpPr>
       <p:sp>
         <p:nvSpPr>
-          <p:cNvPr id="2" name="Text 0"/>
-          <p:cNvSpPr/>
-          <p:nvPr/>
-        </p:nvSpPr>
-        <p:spPr>
-          <a:xfrm>
-            <a:off x="822960" y="2011680"/>
-            <a:ext cx="2743200" cy="1463040"/>
-          </a:xfrm>
-          <a:prstGeom prst="rect">
-            <a:avLst/>
-          </a:prstGeom>
-          <a:noFill/>
-          <a:ln/>
-        </p:spPr>
-        <p:txBody>
-          <a:bodyPr wrap="square" rtlCol="0" anchor="ctr"/>
-          <a:lstStyle/>
-          <a:p>
-            <a:pPr indent="0" marL="0">
-              <a:buNone/>
-            </a:pPr>
-            <a:r>
-              <a:rPr lang="en-US" sz="9000" b="1" dirty="0">
-                <a:solidFill>
-                  <a:srgbClr val="FFFFFF">
-                    <a:alpha val="30000"/>
-                  </a:srgbClr>
-                </a:solidFill>
-                <a:latin typeface="Segoe UI" pitchFamily="34" charset="0"/>
-                <a:ea typeface="Segoe UI" pitchFamily="34" charset="-122"/>
-                <a:cs typeface="Segoe UI" pitchFamily="34" charset="-120"/>
-              </a:rPr>
-              <a:t>03</a:t>
-            </a:r>
-            <a:endParaRPr lang="en-US" sz="9000" dirty="0"/>
-          </a:p>
-        </p:txBody>
+          <p:cNvPr id="2" name="Shape 0"/>
+          <p:cNvSpPr/>
+          <p:nvPr/>
+        </p:nvSpPr>
+        <p:spPr>
+          <a:xfrm>
+            <a:off x="0" y="0"/>
+            <a:ext cx="12191695" cy="1234440"/>
+          </a:xfrm>
+          <a:prstGeom prst="rect">
+            <a:avLst/>
+          </a:prstGeom>
+          <a:solidFill>
+            <a:srgbClr val="7C3AED"/>
+          </a:solidFill>
+          <a:ln/>
+        </p:spPr>
       </p:sp>
       <p:sp>
         <p:nvSpPr>
@@ -2533,8 +2273,8 @@
         </p:nvSpPr>
         <p:spPr>
           <a:xfrm>
-            <a:off x="868680" y="3429000"/>
-            <a:ext cx="1280160" cy="64008"/>
+            <a:off x="502920" y="310896"/>
+            <a:ext cx="82296" cy="621792"/>
           </a:xfrm>
           <a:prstGeom prst="rect">
             <a:avLst/>
@@ -2553,24 +2293,24 @@
         </p:nvSpPr>
         <p:spPr>
           <a:xfrm>
-            <a:off x="822960" y="3611880"/>
-            <a:ext cx="10058400" cy="914400"/>
-          </a:xfrm>
-          <a:prstGeom prst="rect">
-            <a:avLst/>
-          </a:prstGeom>
-          <a:noFill/>
-          <a:ln/>
-        </p:spPr>
-        <p:txBody>
-          <a:bodyPr wrap="square" rtlCol="0" anchor="ctr"/>
-          <a:lstStyle/>
-          <a:p>
-            <a:pPr indent="0" marL="0">
-              <a:buNone/>
-            </a:pPr>
-            <a:r>
-              <a:rPr lang="en-US" sz="4000" b="1" dirty="0">
+            <a:off x="777240" y="237744"/>
+            <a:ext cx="9601200" cy="502920"/>
+          </a:xfrm>
+          <a:prstGeom prst="rect">
+            <a:avLst/>
+          </a:prstGeom>
+          <a:noFill/>
+          <a:ln/>
+        </p:spPr>
+        <p:txBody>
+          <a:bodyPr wrap="square" rtlCol="0" anchor="ctr"/>
+          <a:lstStyle/>
+          <a:p>
+            <a:pPr indent="0" marL="0">
+              <a:buNone/>
+            </a:pPr>
+            <a:r>
+              <a:rPr lang="en-US" sz="2400" b="1" dirty="0">
                 <a:solidFill>
                   <a:srgbClr val="FFFFFF"/>
                 </a:solidFill>
@@ -2578,9 +2318,9 @@
                 <a:ea typeface="Segoe UI" pitchFamily="34" charset="-122"/>
                 <a:cs typeface="Segoe UI" pitchFamily="34" charset="-120"/>
               </a:rPr>
-              <a:t>Drawing Requests</a:t>
-            </a:r>
-            <a:endParaRPr lang="en-US" sz="4000" dirty="0"/>
+              <a:t>Tracking Every Ticket</a:t>
+            </a:r>
+            <a:endParaRPr lang="en-US" sz="2400" dirty="0"/>
           </a:p>
         </p:txBody>
       </p:sp>
@@ -2592,24 +2332,24 @@
         </p:nvSpPr>
         <p:spPr>
           <a:xfrm>
-            <a:off x="822960" y="4434840"/>
-            <a:ext cx="9144000" cy="548640"/>
-          </a:xfrm>
-          <a:prstGeom prst="rect">
-            <a:avLst/>
-          </a:prstGeom>
-          <a:noFill/>
-          <a:ln/>
-        </p:spPr>
-        <p:txBody>
-          <a:bodyPr wrap="square" rtlCol="0" anchor="ctr"/>
-          <a:lstStyle/>
-          <a:p>
-            <a:pPr indent="0" marL="0">
-              <a:buNone/>
-            </a:pPr>
-            <a:r>
-              <a:rPr lang="en-US" sz="1500" dirty="0">
+            <a:off x="777240" y="713232"/>
+            <a:ext cx="10515600" cy="365760"/>
+          </a:xfrm>
+          <a:prstGeom prst="rect">
+            <a:avLst/>
+          </a:prstGeom>
+          <a:noFill/>
+          <a:ln/>
+        </p:spPr>
+        <p:txBody>
+          <a:bodyPr wrap="square" rtlCol="0" anchor="ctr"/>
+          <a:lstStyle/>
+          <a:p>
+            <a:pPr indent="0" marL="0">
+              <a:buNone/>
+            </a:pPr>
+            <a:r>
+              <a:rPr lang="en-US" sz="1250" dirty="0">
                 <a:solidFill>
                   <a:srgbClr val="FFFFFF">
                     <a:alpha val="85000"/>
@@ -2619,9 +2359,421 @@
                 <a:ea typeface="Segoe UI" pitchFamily="34" charset="-122"/>
                 <a:cs typeface="Segoe UI" pitchFamily="34" charset="-120"/>
               </a:rPr>
-              <a:t>Raise it in seconds on site — track it through AGM, GM, and Planning until it's resolved.</a:t>
-            </a:r>
-            <a:endParaRPr lang="en-US" sz="1500" dirty="0"/>
+              <a:t>One list, searchable and filterable, for everything the site has ever asked Planning/Design for.</a:t>
+            </a:r>
+            <a:endParaRPr lang="en-US" sz="1250" dirty="0"/>
+          </a:p>
+        </p:txBody>
+      </p:sp>
+      <p:sp>
+        <p:nvSpPr>
+          <p:cNvPr id="6" name="Shape 4"/>
+          <p:cNvSpPr/>
+          <p:nvPr/>
+        </p:nvSpPr>
+        <p:spPr>
+          <a:xfrm>
+            <a:off x="640080" y="1819656"/>
+            <a:ext cx="82296" cy="82296"/>
+          </a:xfrm>
+          <a:prstGeom prst="rect">
+            <a:avLst/>
+          </a:prstGeom>
+          <a:solidFill>
+            <a:srgbClr val="7C3AED"/>
+          </a:solidFill>
+          <a:ln/>
+        </p:spPr>
+      </p:sp>
+      <p:sp>
+        <p:nvSpPr>
+          <p:cNvPr id="7" name="Text 5"/>
+          <p:cNvSpPr/>
+          <p:nvPr/>
+        </p:nvSpPr>
+        <p:spPr>
+          <a:xfrm>
+            <a:off x="896112" y="1682496"/>
+            <a:ext cx="4773168" cy="292608"/>
+          </a:xfrm>
+          <a:prstGeom prst="rect">
+            <a:avLst/>
+          </a:prstGeom>
+          <a:noFill/>
+          <a:ln/>
+        </p:spPr>
+        <p:txBody>
+          <a:bodyPr wrap="square" rtlCol="0" anchor="ctr"/>
+          <a:lstStyle/>
+          <a:p>
+            <a:pPr indent="0" marL="0">
+              <a:buNone/>
+            </a:pPr>
+            <a:r>
+              <a:rPr lang="en-US" sz="1450" b="1" dirty="0">
+                <a:solidFill>
+                  <a:srgbClr val="1A1A2E"/>
+                </a:solidFill>
+                <a:latin typeface="Segoe UI" pitchFamily="34" charset="0"/>
+                <a:ea typeface="Segoe UI" pitchFamily="34" charset="-122"/>
+                <a:cs typeface="Segoe UI" pitchFamily="34" charset="-120"/>
+              </a:rPr>
+              <a:t>Search &amp; filter</a:t>
+            </a:r>
+            <a:endParaRPr lang="en-US" sz="1450" dirty="0"/>
+          </a:p>
+        </p:txBody>
+      </p:sp>
+      <p:sp>
+        <p:nvSpPr>
+          <p:cNvPr id="8" name="Text 6"/>
+          <p:cNvSpPr/>
+          <p:nvPr/>
+        </p:nvSpPr>
+        <p:spPr>
+          <a:xfrm>
+            <a:off x="896112" y="1975104"/>
+            <a:ext cx="4773168" cy="566928"/>
+          </a:xfrm>
+          <a:prstGeom prst="rect">
+            <a:avLst/>
+          </a:prstGeom>
+          <a:noFill/>
+          <a:ln/>
+        </p:spPr>
+        <p:txBody>
+          <a:bodyPr wrap="square" rtlCol="0" anchor="ctr"/>
+          <a:lstStyle/>
+          <a:p>
+            <a:pPr indent="0" marL="0">
+              <a:lnSpc>
+                <a:spcPct val="115000"/>
+              </a:lnSpc>
+              <a:buNone/>
+            </a:pPr>
+            <a:r>
+              <a:rPr lang="en-US" sz="1150" dirty="0">
+                <a:solidFill>
+                  <a:srgbClr val="475569"/>
+                </a:solidFill>
+                <a:latin typeface="Segoe UI" pitchFamily="34" charset="0"/>
+                <a:ea typeface="Segoe UI" pitchFamily="34" charset="-122"/>
+                <a:cs typeface="Segoe UI" pitchFamily="34" charset="-120"/>
+              </a:rPr>
+              <a:t>By project, drawing type, priority, status, or a date range — find any ticket in seconds.</a:t>
+            </a:r>
+            <a:endParaRPr lang="en-US" sz="1150" dirty="0"/>
+          </a:p>
+        </p:txBody>
+      </p:sp>
+      <p:sp>
+        <p:nvSpPr>
+          <p:cNvPr id="9" name="Shape 7"/>
+          <p:cNvSpPr/>
+          <p:nvPr/>
+        </p:nvSpPr>
+        <p:spPr>
+          <a:xfrm>
+            <a:off x="640080" y="2752344"/>
+            <a:ext cx="82296" cy="82296"/>
+          </a:xfrm>
+          <a:prstGeom prst="rect">
+            <a:avLst/>
+          </a:prstGeom>
+          <a:solidFill>
+            <a:srgbClr val="7C3AED"/>
+          </a:solidFill>
+          <a:ln/>
+        </p:spPr>
+      </p:sp>
+      <p:sp>
+        <p:nvSpPr>
+          <p:cNvPr id="10" name="Text 8"/>
+          <p:cNvSpPr/>
+          <p:nvPr/>
+        </p:nvSpPr>
+        <p:spPr>
+          <a:xfrm>
+            <a:off x="896112" y="2615184"/>
+            <a:ext cx="4773168" cy="292608"/>
+          </a:xfrm>
+          <a:prstGeom prst="rect">
+            <a:avLst/>
+          </a:prstGeom>
+          <a:noFill/>
+          <a:ln/>
+        </p:spPr>
+        <p:txBody>
+          <a:bodyPr wrap="square" rtlCol="0" anchor="ctr"/>
+          <a:lstStyle/>
+          <a:p>
+            <a:pPr indent="0" marL="0">
+              <a:buNone/>
+            </a:pPr>
+            <a:r>
+              <a:rPr lang="en-US" sz="1450" b="1" dirty="0">
+                <a:solidFill>
+                  <a:srgbClr val="1A1A2E"/>
+                </a:solidFill>
+                <a:latin typeface="Segoe UI" pitchFamily="34" charset="0"/>
+                <a:ea typeface="Segoe UI" pitchFamily="34" charset="-122"/>
+                <a:cs typeface="Segoe UI" pitchFamily="34" charset="-120"/>
+              </a:rPr>
+              <a:t>Status at a glance</a:t>
+            </a:r>
+            <a:endParaRPr lang="en-US" sz="1450" dirty="0"/>
+          </a:p>
+        </p:txBody>
+      </p:sp>
+      <p:sp>
+        <p:nvSpPr>
+          <p:cNvPr id="11" name="Text 9"/>
+          <p:cNvSpPr/>
+          <p:nvPr/>
+        </p:nvSpPr>
+        <p:spPr>
+          <a:xfrm>
+            <a:off x="896112" y="2907792"/>
+            <a:ext cx="4773168" cy="566928"/>
+          </a:xfrm>
+          <a:prstGeom prst="rect">
+            <a:avLst/>
+          </a:prstGeom>
+          <a:noFill/>
+          <a:ln/>
+        </p:spPr>
+        <p:txBody>
+          <a:bodyPr wrap="square" rtlCol="0" anchor="ctr"/>
+          <a:lstStyle/>
+          <a:p>
+            <a:pPr indent="0" marL="0">
+              <a:lnSpc>
+                <a:spcPct val="115000"/>
+              </a:lnSpc>
+              <a:buNone/>
+            </a:pPr>
+            <a:r>
+              <a:rPr lang="en-US" sz="1150" dirty="0">
+                <a:solidFill>
+                  <a:srgbClr val="475569"/>
+                </a:solidFill>
+                <a:latin typeface="Segoe UI" pitchFamily="34" charset="0"/>
+                <a:ea typeface="Segoe UI" pitchFamily="34" charset="-122"/>
+                <a:cs typeface="Segoe UI" pitchFamily="34" charset="-120"/>
+              </a:rPr>
+              <a:t>Pending, Committed, Completed, or Delayed — colour-coded across the whole list.</a:t>
+            </a:r>
+            <a:endParaRPr lang="en-US" sz="1150" dirty="0"/>
+          </a:p>
+        </p:txBody>
+      </p:sp>
+      <p:sp>
+        <p:nvSpPr>
+          <p:cNvPr id="12" name="Shape 10"/>
+          <p:cNvSpPr/>
+          <p:nvPr/>
+        </p:nvSpPr>
+        <p:spPr>
+          <a:xfrm>
+            <a:off x="640080" y="3685032"/>
+            <a:ext cx="82296" cy="82296"/>
+          </a:xfrm>
+          <a:prstGeom prst="rect">
+            <a:avLst/>
+          </a:prstGeom>
+          <a:solidFill>
+            <a:srgbClr val="7C3AED"/>
+          </a:solidFill>
+          <a:ln/>
+        </p:spPr>
+      </p:sp>
+      <p:sp>
+        <p:nvSpPr>
+          <p:cNvPr id="13" name="Text 11"/>
+          <p:cNvSpPr/>
+          <p:nvPr/>
+        </p:nvSpPr>
+        <p:spPr>
+          <a:xfrm>
+            <a:off x="896112" y="3547872"/>
+            <a:ext cx="4773168" cy="292608"/>
+          </a:xfrm>
+          <a:prstGeom prst="rect">
+            <a:avLst/>
+          </a:prstGeom>
+          <a:noFill/>
+          <a:ln/>
+        </p:spPr>
+        <p:txBody>
+          <a:bodyPr wrap="square" rtlCol="0" anchor="ctr"/>
+          <a:lstStyle/>
+          <a:p>
+            <a:pPr indent="0" marL="0">
+              <a:buNone/>
+            </a:pPr>
+            <a:r>
+              <a:rPr lang="en-US" sz="1450" b="1" dirty="0">
+                <a:solidFill>
+                  <a:srgbClr val="1A1A2E"/>
+                </a:solidFill>
+                <a:latin typeface="Segoe UI" pitchFamily="34" charset="0"/>
+                <a:ea typeface="Segoe UI" pitchFamily="34" charset="-122"/>
+                <a:cs typeface="Segoe UI" pitchFamily="34" charset="-120"/>
+              </a:rPr>
+              <a:t>Everything in one row</a:t>
+            </a:r>
+            <a:endParaRPr lang="en-US" sz="1450" dirty="0"/>
+          </a:p>
+        </p:txBody>
+      </p:sp>
+      <p:sp>
+        <p:nvSpPr>
+          <p:cNvPr id="14" name="Text 12"/>
+          <p:cNvSpPr/>
+          <p:nvPr/>
+        </p:nvSpPr>
+        <p:spPr>
+          <a:xfrm>
+            <a:off x="896112" y="3840480"/>
+            <a:ext cx="4773168" cy="566928"/>
+          </a:xfrm>
+          <a:prstGeom prst="rect">
+            <a:avLst/>
+          </a:prstGeom>
+          <a:noFill/>
+          <a:ln/>
+        </p:spPr>
+        <p:txBody>
+          <a:bodyPr wrap="square" rtlCol="0" anchor="ctr"/>
+          <a:lstStyle/>
+          <a:p>
+            <a:pPr indent="0" marL="0">
+              <a:lnSpc>
+                <a:spcPct val="115000"/>
+              </a:lnSpc>
+              <a:buNone/>
+            </a:pPr>
+            <a:r>
+              <a:rPr lang="en-US" sz="1150" dirty="0">
+                <a:solidFill>
+                  <a:srgbClr val="475569"/>
+                </a:solidFill>
+                <a:latin typeface="Segoe UI" pitchFamily="34" charset="0"/>
+                <a:ea typeface="Segoe UI" pitchFamily="34" charset="-122"/>
+                <a:cs typeface="Segoe UI" pitchFamily="34" charset="-120"/>
+              </a:rPr>
+              <a:t>Ticket No, requester, assigned owner, priority, committed date, and actual completion — no digging required.</a:t>
+            </a:r>
+            <a:endParaRPr lang="en-US" sz="1150" dirty="0"/>
+          </a:p>
+        </p:txBody>
+      </p:sp>
+      <p:pic>
+        <p:nvPicPr>
+          <p:cNvPr id="15" name="Image 0" descr="shots/14_drawing_requests_list.png">    </p:cNvPr>
+          <p:cNvPicPr>
+            <a:picLocks noChangeAspect="1"/>
+          </p:cNvPicPr>
+          <p:nvPr/>
+        </p:nvPicPr>
+        <p:blipFill>
+          <a:blip r:embed="rId1"/>
+          <a:stretch>
+            <a:fillRect/>
+          </a:stretch>
+        </p:blipFill>
+        <p:spPr>
+          <a:xfrm>
+            <a:off x="5989320" y="1600200"/>
+            <a:ext cx="5669280" cy="4663440"/>
+          </a:xfrm>
+          <a:prstGeom prst="rect">
+            <a:avLst/>
+          </a:prstGeom>
+          <a:effectLst>
+            <a:outerShdw sx="100000" sy="100000" kx="0" ky="0" algn="bl" rotWithShape="0" blurRad="228600" dist="76200" dir="5400000">
+              <a:srgbClr val="1A1A2E">
+                <a:alpha val="35000"/>
+              </a:srgbClr>
+            </a:outerShdw>
+          </a:effectLst>
+        </p:spPr>
+      </p:pic>
+      <p:sp>
+        <p:nvSpPr>
+          <p:cNvPr id="16" name="Text 13"/>
+          <p:cNvSpPr/>
+          <p:nvPr/>
+        </p:nvSpPr>
+        <p:spPr>
+          <a:xfrm>
+            <a:off x="457200" y="6547104"/>
+            <a:ext cx="5486400" cy="274320"/>
+          </a:xfrm>
+          <a:prstGeom prst="rect">
+            <a:avLst/>
+          </a:prstGeom>
+          <a:noFill/>
+          <a:ln/>
+        </p:spPr>
+        <p:txBody>
+          <a:bodyPr wrap="square" rtlCol="0" anchor="ctr"/>
+          <a:lstStyle/>
+          <a:p>
+            <a:pPr indent="0" marL="0">
+              <a:buNone/>
+            </a:pPr>
+            <a:r>
+              <a:rPr lang="en-US" sz="900" dirty="0">
+                <a:solidFill>
+                  <a:srgbClr val="94A3B8"/>
+                </a:solidFill>
+                <a:latin typeface="Segoe UI" pitchFamily="34" charset="0"/>
+                <a:ea typeface="Segoe UI" pitchFamily="34" charset="-122"/>
+                <a:cs typeface="Segoe UI" pitchFamily="34" charset="-120"/>
+              </a:rPr>
+              <a:t>Nexora ERP  ·  DRI Dashboard Overview</a:t>
+            </a:r>
+            <a:endParaRPr lang="en-US" sz="900" dirty="0"/>
+          </a:p>
+        </p:txBody>
+      </p:sp>
+      <p:sp>
+        <p:nvSpPr>
+          <p:cNvPr id="17" name="Text 14"/>
+          <p:cNvSpPr/>
+          <p:nvPr/>
+        </p:nvSpPr>
+        <p:spPr>
+          <a:xfrm>
+            <a:off x="11521440" y="6547104"/>
+            <a:ext cx="365760" cy="274320"/>
+          </a:xfrm>
+          <a:prstGeom prst="rect">
+            <a:avLst/>
+          </a:prstGeom>
+          <a:noFill/>
+          <a:ln/>
+        </p:spPr>
+        <p:txBody>
+          <a:bodyPr wrap="square" rtlCol="0" anchor="ctr"/>
+          <a:lstStyle/>
+          <a:p>
+            <a:pPr algn="r" indent="0" marL="0">
+              <a:buNone/>
+            </a:pPr>
+            <a:r>
+              <a:rPr lang="en-US" sz="900" dirty="0">
+                <a:solidFill>
+                  <a:srgbClr val="94A3B8"/>
+                </a:solidFill>
+                <a:latin typeface="Segoe UI" pitchFamily="34" charset="0"/>
+                <a:ea typeface="Segoe UI" pitchFamily="34" charset="-122"/>
+                <a:cs typeface="Segoe UI" pitchFamily="34" charset="-120"/>
+              </a:rPr>
+              <a:t>8</a:t>
+            </a:r>
+            <a:endParaRPr lang="en-US" sz="900" dirty="0"/>
           </a:p>
         </p:txBody>
       </p:sp>
@@ -2730,7 +2882,7 @@
                 <a:ea typeface="Segoe UI" pitchFamily="34" charset="-122"/>
                 <a:cs typeface="Segoe UI" pitchFamily="34" charset="-120"/>
               </a:rPr>
-              <a:t>Raising a Request</a:t>
+              <a:t>The Full Ticket Lifecycle</a:t>
             </a:r>
             <a:endParaRPr lang="en-US" sz="2400" dirty="0"/>
           </a:p>
@@ -2771,7 +2923,7 @@
                 <a:ea typeface="Segoe UI" pitchFamily="34" charset="-122"/>
                 <a:cs typeface="Segoe UI" pitchFamily="34" charset="-120"/>
               </a:rPr>
-              <a:t>A DRI stuck without a drawing raises a ticket without ever leaving the Daily Progress Report page.</a:t>
+              <a:t>Four short stages carry a request from raised to resolved — each owned by a different role.</a:t>
             </a:r>
             <a:endParaRPr lang="en-US" sz="1250" dirty="0"/>
           </a:p>
@@ -2830,7 +2982,7 @@
                 <a:ea typeface="Segoe UI" pitchFamily="34" charset="-122"/>
                 <a:cs typeface="Segoe UI" pitchFamily="34" charset="-120"/>
               </a:rPr>
-              <a:t>One button, right where it's needed</a:t>
+              <a:t>AGM Response</a:t>
             </a:r>
             <a:endParaRPr lang="en-US" sz="1450" dirty="0"/>
           </a:p>
@@ -2872,7 +3024,7 @@
                 <a:ea typeface="Segoe UI" pitchFamily="34" charset="-122"/>
                 <a:cs typeface="Segoe UI" pitchFamily="34" charset="-120"/>
               </a:rPr>
-              <a:t>"Drawing Request" sits next to "New Report" on the Daily Progress Report page.</a:t>
+              <a:t>Assigns the ticket to someone and commits a target date.</a:t>
             </a:r>
             <a:endParaRPr lang="en-US" sz="1150" dirty="0"/>
           </a:p>
@@ -2931,7 +3083,7 @@
                 <a:ea typeface="Segoe UI" pitchFamily="34" charset="-122"/>
                 <a:cs typeface="Segoe UI" pitchFamily="34" charset="-120"/>
               </a:rPr>
-              <a:t>Just the essentials</a:t>
+              <a:t>GM — Priority</a:t>
             </a:r>
             <a:endParaRPr lang="en-US" sz="1450" dirty="0"/>
           </a:p>
@@ -2973,7 +3125,7 @@
                 <a:ea typeface="Segoe UI" pitchFamily="34" charset="-122"/>
                 <a:cs typeface="Segoe UI" pitchFamily="34" charset="-120"/>
               </a:rPr>
-              <a:t>Project, a description of what's needed, drawing type (Architectural / Structural / MEP / Civil…), and requester name.</a:t>
+              <a:t>Sets how urgently it needs to move.</a:t>
             </a:r>
             <a:endParaRPr lang="en-US" sz="1150" dirty="0"/>
           </a:p>
@@ -3032,7 +3184,7 @@
                 <a:ea typeface="Segoe UI" pitchFamily="34" charset="-122"/>
                 <a:cs typeface="Segoe UI" pitchFamily="34" charset="-120"/>
               </a:rPr>
-              <a:t>Auto-numbered on submit</a:t>
+              <a:t>Planning — Status</a:t>
             </a:r>
             <a:endParaRPr lang="en-US" sz="1450" dirty="0"/>
           </a:p>
@@ -3074,7 +3226,7 @@
                 <a:ea typeface="Segoe UI" pitchFamily="34" charset="-122"/>
                 <a:cs typeface="Segoe UI" pitchFamily="34" charset="-120"/>
               </a:rPr>
-              <a:t>Every request gets its own ticket number (e.g. DR-0003) the moment it's raised.</a:t>
+              <a:t>Updates progress through to an actual completion date.</a:t>
             </a:r>
             <a:endParaRPr lang="en-US" sz="1150" dirty="0"/>
           </a:p>
@@ -3133,7 +3285,7 @@
                 <a:ea typeface="Segoe UI" pitchFamily="34" charset="-122"/>
                 <a:cs typeface="Segoe UI" pitchFamily="34" charset="-120"/>
               </a:rPr>
-              <a:t>Also available publicly</a:t>
+              <a:t>Verification</a:t>
             </a:r>
             <a:endParaRPr lang="en-US" sz="1450" dirty="0"/>
           </a:p>
@@ -3175,7 +3327,7 @@
                 <a:ea typeface="Segoe UI" pitchFamily="34" charset="-122"/>
                 <a:cs typeface="Segoe UI" pitchFamily="34" charset="-120"/>
               </a:rPr>
-              <a:t>A standalone no-login form covers anyone on site without an account.</a:t>
+              <a:t>Planning and the project team both confirm it's genuinely resolved.</a:t>
             </a:r>
             <a:endParaRPr lang="en-US" sz="1150" dirty="0"/>
           </a:p>
@@ -3183,7 +3335,7 @@
       </p:sp>
       <p:pic>
         <p:nvPicPr>
-          <p:cNvPr id="18" name="Image 0" descr="shots/12_drawing_request_filled.png">    </p:cNvPr>
+          <p:cNvPr id="18" name="Image 0" descr="shots/16_drawing_request_edit_modal.png">    </p:cNvPr>
           <p:cNvPicPr>
             <a:picLocks noChangeAspect="1"/>
           </p:cNvPicPr>
@@ -3284,7 +3436,7 @@
                 <a:ea typeface="Segoe UI" pitchFamily="34" charset="-122"/>
                 <a:cs typeface="Segoe UI" pitchFamily="34" charset="-120"/>
               </a:rPr>
-              <a:t>11</a:t>
+              <a:t>9</a:t>
             </a:r>
             <a:endParaRPr lang="en-US" sz="900" dirty="0"/>
           </a:p>
@@ -3301,1235 +3453,6 @@
 <file path=ppt/slides/slide12.xml><?xml version="1.0" encoding="utf-8"?>
 <p:sld xmlns:a="http://schemas.openxmlformats.org/drawingml/2006/main" xmlns:r="http://schemas.openxmlformats.org/officeDocument/2006/relationships" xmlns:p="http://schemas.openxmlformats.org/presentationml/2006/main">
   <p:cSld name="Slide 12">
-    <p:bg>
-      <p:bgPr>
-        <a:solidFill>
-          <a:srgbClr val="FFFFFF"/>
-        </a:solidFill>
-      </p:bgPr>
-    </p:bg>
-    <p:spTree>
-      <p:nvGrpSpPr>
-        <p:cNvPr id="1" name=""/>
-        <p:cNvGrpSpPr/>
-        <p:nvPr/>
-      </p:nvGrpSpPr>
-      <p:grpSpPr>
-        <a:xfrm>
-          <a:off x="0" y="0"/>
-          <a:ext cx="0" cy="0"/>
-          <a:chOff x="0" y="0"/>
-          <a:chExt cx="0" cy="0"/>
-        </a:xfrm>
-      </p:grpSpPr>
-      <p:sp>
-        <p:nvSpPr>
-          <p:cNvPr id="2" name="Shape 0"/>
-          <p:cNvSpPr/>
-          <p:nvPr/>
-        </p:nvSpPr>
-        <p:spPr>
-          <a:xfrm>
-            <a:off x="0" y="0"/>
-            <a:ext cx="12191695" cy="1234440"/>
-          </a:xfrm>
-          <a:prstGeom prst="rect">
-            <a:avLst/>
-          </a:prstGeom>
-          <a:solidFill>
-            <a:srgbClr val="7C3AED"/>
-          </a:solidFill>
-          <a:ln/>
-        </p:spPr>
-      </p:sp>
-      <p:sp>
-        <p:nvSpPr>
-          <p:cNvPr id="3" name="Shape 1"/>
-          <p:cNvSpPr/>
-          <p:nvPr/>
-        </p:nvSpPr>
-        <p:spPr>
-          <a:xfrm>
-            <a:off x="502920" y="310896"/>
-            <a:ext cx="82296" cy="621792"/>
-          </a:xfrm>
-          <a:prstGeom prst="rect">
-            <a:avLst/>
-          </a:prstGeom>
-          <a:solidFill>
-            <a:srgbClr val="FFFFFF"/>
-          </a:solidFill>
-          <a:ln/>
-        </p:spPr>
-      </p:sp>
-      <p:sp>
-        <p:nvSpPr>
-          <p:cNvPr id="4" name="Text 2"/>
-          <p:cNvSpPr/>
-          <p:nvPr/>
-        </p:nvSpPr>
-        <p:spPr>
-          <a:xfrm>
-            <a:off x="777240" y="237744"/>
-            <a:ext cx="9601200" cy="502920"/>
-          </a:xfrm>
-          <a:prstGeom prst="rect">
-            <a:avLst/>
-          </a:prstGeom>
-          <a:noFill/>
-          <a:ln/>
-        </p:spPr>
-        <p:txBody>
-          <a:bodyPr wrap="square" rtlCol="0" anchor="ctr"/>
-          <a:lstStyle/>
-          <a:p>
-            <a:pPr indent="0" marL="0">
-              <a:buNone/>
-            </a:pPr>
-            <a:r>
-              <a:rPr lang="en-US" sz="2400" b="1" dirty="0">
-                <a:solidFill>
-                  <a:srgbClr val="FFFFFF"/>
-                </a:solidFill>
-                <a:latin typeface="Segoe UI" pitchFamily="34" charset="0"/>
-                <a:ea typeface="Segoe UI" pitchFamily="34" charset="-122"/>
-                <a:cs typeface="Segoe UI" pitchFamily="34" charset="-120"/>
-              </a:rPr>
-              <a:t>Tracking Every Ticket</a:t>
-            </a:r>
-            <a:endParaRPr lang="en-US" sz="2400" dirty="0"/>
-          </a:p>
-        </p:txBody>
-      </p:sp>
-      <p:sp>
-        <p:nvSpPr>
-          <p:cNvPr id="5" name="Text 3"/>
-          <p:cNvSpPr/>
-          <p:nvPr/>
-        </p:nvSpPr>
-        <p:spPr>
-          <a:xfrm>
-            <a:off x="777240" y="713232"/>
-            <a:ext cx="10515600" cy="365760"/>
-          </a:xfrm>
-          <a:prstGeom prst="rect">
-            <a:avLst/>
-          </a:prstGeom>
-          <a:noFill/>
-          <a:ln/>
-        </p:spPr>
-        <p:txBody>
-          <a:bodyPr wrap="square" rtlCol="0" anchor="ctr"/>
-          <a:lstStyle/>
-          <a:p>
-            <a:pPr indent="0" marL="0">
-              <a:buNone/>
-            </a:pPr>
-            <a:r>
-              <a:rPr lang="en-US" sz="1250" dirty="0">
-                <a:solidFill>
-                  <a:srgbClr val="FFFFFF">
-                    <a:alpha val="85000"/>
-                  </a:srgbClr>
-                </a:solidFill>
-                <a:latin typeface="Segoe UI" pitchFamily="34" charset="0"/>
-                <a:ea typeface="Segoe UI" pitchFamily="34" charset="-122"/>
-                <a:cs typeface="Segoe UI" pitchFamily="34" charset="-120"/>
-              </a:rPr>
-              <a:t>One list, searchable and filterable, for everything the site has ever asked Planning/Design for.</a:t>
-            </a:r>
-            <a:endParaRPr lang="en-US" sz="1250" dirty="0"/>
-          </a:p>
-        </p:txBody>
-      </p:sp>
-      <p:sp>
-        <p:nvSpPr>
-          <p:cNvPr id="6" name="Shape 4"/>
-          <p:cNvSpPr/>
-          <p:nvPr/>
-        </p:nvSpPr>
-        <p:spPr>
-          <a:xfrm>
-            <a:off x="640080" y="1819656"/>
-            <a:ext cx="82296" cy="82296"/>
-          </a:xfrm>
-          <a:prstGeom prst="rect">
-            <a:avLst/>
-          </a:prstGeom>
-          <a:solidFill>
-            <a:srgbClr val="7C3AED"/>
-          </a:solidFill>
-          <a:ln/>
-        </p:spPr>
-      </p:sp>
-      <p:sp>
-        <p:nvSpPr>
-          <p:cNvPr id="7" name="Text 5"/>
-          <p:cNvSpPr/>
-          <p:nvPr/>
-        </p:nvSpPr>
-        <p:spPr>
-          <a:xfrm>
-            <a:off x="896112" y="1682496"/>
-            <a:ext cx="4773168" cy="292608"/>
-          </a:xfrm>
-          <a:prstGeom prst="rect">
-            <a:avLst/>
-          </a:prstGeom>
-          <a:noFill/>
-          <a:ln/>
-        </p:spPr>
-        <p:txBody>
-          <a:bodyPr wrap="square" rtlCol="0" anchor="ctr"/>
-          <a:lstStyle/>
-          <a:p>
-            <a:pPr indent="0" marL="0">
-              <a:buNone/>
-            </a:pPr>
-            <a:r>
-              <a:rPr lang="en-US" sz="1450" b="1" dirty="0">
-                <a:solidFill>
-                  <a:srgbClr val="1A1A2E"/>
-                </a:solidFill>
-                <a:latin typeface="Segoe UI" pitchFamily="34" charset="0"/>
-                <a:ea typeface="Segoe UI" pitchFamily="34" charset="-122"/>
-                <a:cs typeface="Segoe UI" pitchFamily="34" charset="-120"/>
-              </a:rPr>
-              <a:t>Search &amp; filter</a:t>
-            </a:r>
-            <a:endParaRPr lang="en-US" sz="1450" dirty="0"/>
-          </a:p>
-        </p:txBody>
-      </p:sp>
-      <p:sp>
-        <p:nvSpPr>
-          <p:cNvPr id="8" name="Text 6"/>
-          <p:cNvSpPr/>
-          <p:nvPr/>
-        </p:nvSpPr>
-        <p:spPr>
-          <a:xfrm>
-            <a:off x="896112" y="1975104"/>
-            <a:ext cx="4773168" cy="566928"/>
-          </a:xfrm>
-          <a:prstGeom prst="rect">
-            <a:avLst/>
-          </a:prstGeom>
-          <a:noFill/>
-          <a:ln/>
-        </p:spPr>
-        <p:txBody>
-          <a:bodyPr wrap="square" rtlCol="0" anchor="ctr"/>
-          <a:lstStyle/>
-          <a:p>
-            <a:pPr indent="0" marL="0">
-              <a:lnSpc>
-                <a:spcPct val="115000"/>
-              </a:lnSpc>
-              <a:buNone/>
-            </a:pPr>
-            <a:r>
-              <a:rPr lang="en-US" sz="1150" dirty="0">
-                <a:solidFill>
-                  <a:srgbClr val="475569"/>
-                </a:solidFill>
-                <a:latin typeface="Segoe UI" pitchFamily="34" charset="0"/>
-                <a:ea typeface="Segoe UI" pitchFamily="34" charset="-122"/>
-                <a:cs typeface="Segoe UI" pitchFamily="34" charset="-120"/>
-              </a:rPr>
-              <a:t>By project, drawing type, priority, status, or a date range — find any ticket in seconds.</a:t>
-            </a:r>
-            <a:endParaRPr lang="en-US" sz="1150" dirty="0"/>
-          </a:p>
-        </p:txBody>
-      </p:sp>
-      <p:sp>
-        <p:nvSpPr>
-          <p:cNvPr id="9" name="Shape 7"/>
-          <p:cNvSpPr/>
-          <p:nvPr/>
-        </p:nvSpPr>
-        <p:spPr>
-          <a:xfrm>
-            <a:off x="640080" y="2752344"/>
-            <a:ext cx="82296" cy="82296"/>
-          </a:xfrm>
-          <a:prstGeom prst="rect">
-            <a:avLst/>
-          </a:prstGeom>
-          <a:solidFill>
-            <a:srgbClr val="7C3AED"/>
-          </a:solidFill>
-          <a:ln/>
-        </p:spPr>
-      </p:sp>
-      <p:sp>
-        <p:nvSpPr>
-          <p:cNvPr id="10" name="Text 8"/>
-          <p:cNvSpPr/>
-          <p:nvPr/>
-        </p:nvSpPr>
-        <p:spPr>
-          <a:xfrm>
-            <a:off x="896112" y="2615184"/>
-            <a:ext cx="4773168" cy="292608"/>
-          </a:xfrm>
-          <a:prstGeom prst="rect">
-            <a:avLst/>
-          </a:prstGeom>
-          <a:noFill/>
-          <a:ln/>
-        </p:spPr>
-        <p:txBody>
-          <a:bodyPr wrap="square" rtlCol="0" anchor="ctr"/>
-          <a:lstStyle/>
-          <a:p>
-            <a:pPr indent="0" marL="0">
-              <a:buNone/>
-            </a:pPr>
-            <a:r>
-              <a:rPr lang="en-US" sz="1450" b="1" dirty="0">
-                <a:solidFill>
-                  <a:srgbClr val="1A1A2E"/>
-                </a:solidFill>
-                <a:latin typeface="Segoe UI" pitchFamily="34" charset="0"/>
-                <a:ea typeface="Segoe UI" pitchFamily="34" charset="-122"/>
-                <a:cs typeface="Segoe UI" pitchFamily="34" charset="-120"/>
-              </a:rPr>
-              <a:t>Status at a glance</a:t>
-            </a:r>
-            <a:endParaRPr lang="en-US" sz="1450" dirty="0"/>
-          </a:p>
-        </p:txBody>
-      </p:sp>
-      <p:sp>
-        <p:nvSpPr>
-          <p:cNvPr id="11" name="Text 9"/>
-          <p:cNvSpPr/>
-          <p:nvPr/>
-        </p:nvSpPr>
-        <p:spPr>
-          <a:xfrm>
-            <a:off x="896112" y="2907792"/>
-            <a:ext cx="4773168" cy="566928"/>
-          </a:xfrm>
-          <a:prstGeom prst="rect">
-            <a:avLst/>
-          </a:prstGeom>
-          <a:noFill/>
-          <a:ln/>
-        </p:spPr>
-        <p:txBody>
-          <a:bodyPr wrap="square" rtlCol="0" anchor="ctr"/>
-          <a:lstStyle/>
-          <a:p>
-            <a:pPr indent="0" marL="0">
-              <a:lnSpc>
-                <a:spcPct val="115000"/>
-              </a:lnSpc>
-              <a:buNone/>
-            </a:pPr>
-            <a:r>
-              <a:rPr lang="en-US" sz="1150" dirty="0">
-                <a:solidFill>
-                  <a:srgbClr val="475569"/>
-                </a:solidFill>
-                <a:latin typeface="Segoe UI" pitchFamily="34" charset="0"/>
-                <a:ea typeface="Segoe UI" pitchFamily="34" charset="-122"/>
-                <a:cs typeface="Segoe UI" pitchFamily="34" charset="-120"/>
-              </a:rPr>
-              <a:t>Pending, Committed, Completed, or Delayed — colour-coded across the whole list.</a:t>
-            </a:r>
-            <a:endParaRPr lang="en-US" sz="1150" dirty="0"/>
-          </a:p>
-        </p:txBody>
-      </p:sp>
-      <p:sp>
-        <p:nvSpPr>
-          <p:cNvPr id="12" name="Shape 10"/>
-          <p:cNvSpPr/>
-          <p:nvPr/>
-        </p:nvSpPr>
-        <p:spPr>
-          <a:xfrm>
-            <a:off x="640080" y="3685032"/>
-            <a:ext cx="82296" cy="82296"/>
-          </a:xfrm>
-          <a:prstGeom prst="rect">
-            <a:avLst/>
-          </a:prstGeom>
-          <a:solidFill>
-            <a:srgbClr val="7C3AED"/>
-          </a:solidFill>
-          <a:ln/>
-        </p:spPr>
-      </p:sp>
-      <p:sp>
-        <p:nvSpPr>
-          <p:cNvPr id="13" name="Text 11"/>
-          <p:cNvSpPr/>
-          <p:nvPr/>
-        </p:nvSpPr>
-        <p:spPr>
-          <a:xfrm>
-            <a:off x="896112" y="3547872"/>
-            <a:ext cx="4773168" cy="292608"/>
-          </a:xfrm>
-          <a:prstGeom prst="rect">
-            <a:avLst/>
-          </a:prstGeom>
-          <a:noFill/>
-          <a:ln/>
-        </p:spPr>
-        <p:txBody>
-          <a:bodyPr wrap="square" rtlCol="0" anchor="ctr"/>
-          <a:lstStyle/>
-          <a:p>
-            <a:pPr indent="0" marL="0">
-              <a:buNone/>
-            </a:pPr>
-            <a:r>
-              <a:rPr lang="en-US" sz="1450" b="1" dirty="0">
-                <a:solidFill>
-                  <a:srgbClr val="1A1A2E"/>
-                </a:solidFill>
-                <a:latin typeface="Segoe UI" pitchFamily="34" charset="0"/>
-                <a:ea typeface="Segoe UI" pitchFamily="34" charset="-122"/>
-                <a:cs typeface="Segoe UI" pitchFamily="34" charset="-120"/>
-              </a:rPr>
-              <a:t>Everything in one row</a:t>
-            </a:r>
-            <a:endParaRPr lang="en-US" sz="1450" dirty="0"/>
-          </a:p>
-        </p:txBody>
-      </p:sp>
-      <p:sp>
-        <p:nvSpPr>
-          <p:cNvPr id="14" name="Text 12"/>
-          <p:cNvSpPr/>
-          <p:nvPr/>
-        </p:nvSpPr>
-        <p:spPr>
-          <a:xfrm>
-            <a:off x="896112" y="3840480"/>
-            <a:ext cx="4773168" cy="566928"/>
-          </a:xfrm>
-          <a:prstGeom prst="rect">
-            <a:avLst/>
-          </a:prstGeom>
-          <a:noFill/>
-          <a:ln/>
-        </p:spPr>
-        <p:txBody>
-          <a:bodyPr wrap="square" rtlCol="0" anchor="ctr"/>
-          <a:lstStyle/>
-          <a:p>
-            <a:pPr indent="0" marL="0">
-              <a:lnSpc>
-                <a:spcPct val="115000"/>
-              </a:lnSpc>
-              <a:buNone/>
-            </a:pPr>
-            <a:r>
-              <a:rPr lang="en-US" sz="1150" dirty="0">
-                <a:solidFill>
-                  <a:srgbClr val="475569"/>
-                </a:solidFill>
-                <a:latin typeface="Segoe UI" pitchFamily="34" charset="0"/>
-                <a:ea typeface="Segoe UI" pitchFamily="34" charset="-122"/>
-                <a:cs typeface="Segoe UI" pitchFamily="34" charset="-120"/>
-              </a:rPr>
-              <a:t>Ticket No, requester, assigned owner, priority, committed date, and actual completion — no digging required.</a:t>
-            </a:r>
-            <a:endParaRPr lang="en-US" sz="1150" dirty="0"/>
-          </a:p>
-        </p:txBody>
-      </p:sp>
-      <p:pic>
-        <p:nvPicPr>
-          <p:cNvPr id="15" name="Image 0" descr="shots/14_drawing_requests_list.png">    </p:cNvPr>
-          <p:cNvPicPr>
-            <a:picLocks noChangeAspect="1"/>
-          </p:cNvPicPr>
-          <p:nvPr/>
-        </p:nvPicPr>
-        <p:blipFill>
-          <a:blip r:embed="rId1"/>
-          <a:stretch>
-            <a:fillRect/>
-          </a:stretch>
-        </p:blipFill>
-        <p:spPr>
-          <a:xfrm>
-            <a:off x="5989320" y="1600200"/>
-            <a:ext cx="5669280" cy="4663440"/>
-          </a:xfrm>
-          <a:prstGeom prst="rect">
-            <a:avLst/>
-          </a:prstGeom>
-          <a:effectLst>
-            <a:outerShdw sx="100000" sy="100000" kx="0" ky="0" algn="bl" rotWithShape="0" blurRad="228600" dist="76200" dir="5400000">
-              <a:srgbClr val="1A1A2E">
-                <a:alpha val="35000"/>
-              </a:srgbClr>
-            </a:outerShdw>
-          </a:effectLst>
-        </p:spPr>
-      </p:pic>
-      <p:sp>
-        <p:nvSpPr>
-          <p:cNvPr id="16" name="Text 13"/>
-          <p:cNvSpPr/>
-          <p:nvPr/>
-        </p:nvSpPr>
-        <p:spPr>
-          <a:xfrm>
-            <a:off x="457200" y="6547104"/>
-            <a:ext cx="5486400" cy="274320"/>
-          </a:xfrm>
-          <a:prstGeom prst="rect">
-            <a:avLst/>
-          </a:prstGeom>
-          <a:noFill/>
-          <a:ln/>
-        </p:spPr>
-        <p:txBody>
-          <a:bodyPr wrap="square" rtlCol="0" anchor="ctr"/>
-          <a:lstStyle/>
-          <a:p>
-            <a:pPr indent="0" marL="0">
-              <a:buNone/>
-            </a:pPr>
-            <a:r>
-              <a:rPr lang="en-US" sz="900" dirty="0">
-                <a:solidFill>
-                  <a:srgbClr val="94A3B8"/>
-                </a:solidFill>
-                <a:latin typeface="Segoe UI" pitchFamily="34" charset="0"/>
-                <a:ea typeface="Segoe UI" pitchFamily="34" charset="-122"/>
-                <a:cs typeface="Segoe UI" pitchFamily="34" charset="-120"/>
-              </a:rPr>
-              <a:t>Nexora ERP  ·  DRI Dashboard Overview</a:t>
-            </a:r>
-            <a:endParaRPr lang="en-US" sz="900" dirty="0"/>
-          </a:p>
-        </p:txBody>
-      </p:sp>
-      <p:sp>
-        <p:nvSpPr>
-          <p:cNvPr id="17" name="Text 14"/>
-          <p:cNvSpPr/>
-          <p:nvPr/>
-        </p:nvSpPr>
-        <p:spPr>
-          <a:xfrm>
-            <a:off x="11521440" y="6547104"/>
-            <a:ext cx="365760" cy="274320"/>
-          </a:xfrm>
-          <a:prstGeom prst="rect">
-            <a:avLst/>
-          </a:prstGeom>
-          <a:noFill/>
-          <a:ln/>
-        </p:spPr>
-        <p:txBody>
-          <a:bodyPr wrap="square" rtlCol="0" anchor="ctr"/>
-          <a:lstStyle/>
-          <a:p>
-            <a:pPr algn="r" indent="0" marL="0">
-              <a:buNone/>
-            </a:pPr>
-            <a:r>
-              <a:rPr lang="en-US" sz="900" dirty="0">
-                <a:solidFill>
-                  <a:srgbClr val="94A3B8"/>
-                </a:solidFill>
-                <a:latin typeface="Segoe UI" pitchFamily="34" charset="0"/>
-                <a:ea typeface="Segoe UI" pitchFamily="34" charset="-122"/>
-                <a:cs typeface="Segoe UI" pitchFamily="34" charset="-120"/>
-              </a:rPr>
-              <a:t>12</a:t>
-            </a:r>
-            <a:endParaRPr lang="en-US" sz="900" dirty="0"/>
-          </a:p>
-        </p:txBody>
-      </p:sp>
-    </p:spTree>
-  </p:cSld>
-  <p:clrMapOvr>
-    <a:masterClrMapping/>
-  </p:clrMapOvr>
-</p:sld>
-</file>
-
-<file path=ppt/slides/slide13.xml><?xml version="1.0" encoding="utf-8"?>
-<p:sld xmlns:a="http://schemas.openxmlformats.org/drawingml/2006/main" xmlns:r="http://schemas.openxmlformats.org/officeDocument/2006/relationships" xmlns:p="http://schemas.openxmlformats.org/presentationml/2006/main">
-  <p:cSld name="Slide 13">
-    <p:bg>
-      <p:bgPr>
-        <a:solidFill>
-          <a:srgbClr val="FFFFFF"/>
-        </a:solidFill>
-      </p:bgPr>
-    </p:bg>
-    <p:spTree>
-      <p:nvGrpSpPr>
-        <p:cNvPr id="1" name=""/>
-        <p:cNvGrpSpPr/>
-        <p:nvPr/>
-      </p:nvGrpSpPr>
-      <p:grpSpPr>
-        <a:xfrm>
-          <a:off x="0" y="0"/>
-          <a:ext cx="0" cy="0"/>
-          <a:chOff x="0" y="0"/>
-          <a:chExt cx="0" cy="0"/>
-        </a:xfrm>
-      </p:grpSpPr>
-      <p:sp>
-        <p:nvSpPr>
-          <p:cNvPr id="2" name="Shape 0"/>
-          <p:cNvSpPr/>
-          <p:nvPr/>
-        </p:nvSpPr>
-        <p:spPr>
-          <a:xfrm>
-            <a:off x="0" y="0"/>
-            <a:ext cx="12191695" cy="1234440"/>
-          </a:xfrm>
-          <a:prstGeom prst="rect">
-            <a:avLst/>
-          </a:prstGeom>
-          <a:solidFill>
-            <a:srgbClr val="7C3AED"/>
-          </a:solidFill>
-          <a:ln/>
-        </p:spPr>
-      </p:sp>
-      <p:sp>
-        <p:nvSpPr>
-          <p:cNvPr id="3" name="Shape 1"/>
-          <p:cNvSpPr/>
-          <p:nvPr/>
-        </p:nvSpPr>
-        <p:spPr>
-          <a:xfrm>
-            <a:off x="502920" y="310896"/>
-            <a:ext cx="82296" cy="621792"/>
-          </a:xfrm>
-          <a:prstGeom prst="rect">
-            <a:avLst/>
-          </a:prstGeom>
-          <a:solidFill>
-            <a:srgbClr val="FFFFFF"/>
-          </a:solidFill>
-          <a:ln/>
-        </p:spPr>
-      </p:sp>
-      <p:sp>
-        <p:nvSpPr>
-          <p:cNvPr id="4" name="Text 2"/>
-          <p:cNvSpPr/>
-          <p:nvPr/>
-        </p:nvSpPr>
-        <p:spPr>
-          <a:xfrm>
-            <a:off x="777240" y="237744"/>
-            <a:ext cx="9601200" cy="502920"/>
-          </a:xfrm>
-          <a:prstGeom prst="rect">
-            <a:avLst/>
-          </a:prstGeom>
-          <a:noFill/>
-          <a:ln/>
-        </p:spPr>
-        <p:txBody>
-          <a:bodyPr wrap="square" rtlCol="0" anchor="ctr"/>
-          <a:lstStyle/>
-          <a:p>
-            <a:pPr indent="0" marL="0">
-              <a:buNone/>
-            </a:pPr>
-            <a:r>
-              <a:rPr lang="en-US" sz="2400" b="1" dirty="0">
-                <a:solidFill>
-                  <a:srgbClr val="FFFFFF"/>
-                </a:solidFill>
-                <a:latin typeface="Segoe UI" pitchFamily="34" charset="0"/>
-                <a:ea typeface="Segoe UI" pitchFamily="34" charset="-122"/>
-                <a:cs typeface="Segoe UI" pitchFamily="34" charset="-120"/>
-              </a:rPr>
-              <a:t>The Full Ticket Lifecycle</a:t>
-            </a:r>
-            <a:endParaRPr lang="en-US" sz="2400" dirty="0"/>
-          </a:p>
-        </p:txBody>
-      </p:sp>
-      <p:sp>
-        <p:nvSpPr>
-          <p:cNvPr id="5" name="Text 3"/>
-          <p:cNvSpPr/>
-          <p:nvPr/>
-        </p:nvSpPr>
-        <p:spPr>
-          <a:xfrm>
-            <a:off x="777240" y="713232"/>
-            <a:ext cx="10515600" cy="365760"/>
-          </a:xfrm>
-          <a:prstGeom prst="rect">
-            <a:avLst/>
-          </a:prstGeom>
-          <a:noFill/>
-          <a:ln/>
-        </p:spPr>
-        <p:txBody>
-          <a:bodyPr wrap="square" rtlCol="0" anchor="ctr"/>
-          <a:lstStyle/>
-          <a:p>
-            <a:pPr indent="0" marL="0">
-              <a:buNone/>
-            </a:pPr>
-            <a:r>
-              <a:rPr lang="en-US" sz="1250" dirty="0">
-                <a:solidFill>
-                  <a:srgbClr val="FFFFFF">
-                    <a:alpha val="85000"/>
-                  </a:srgbClr>
-                </a:solidFill>
-                <a:latin typeface="Segoe UI" pitchFamily="34" charset="0"/>
-                <a:ea typeface="Segoe UI" pitchFamily="34" charset="-122"/>
-                <a:cs typeface="Segoe UI" pitchFamily="34" charset="-120"/>
-              </a:rPr>
-              <a:t>Four short stages carry a request from raised to resolved — each owned by a different role.</a:t>
-            </a:r>
-            <a:endParaRPr lang="en-US" sz="1250" dirty="0"/>
-          </a:p>
-        </p:txBody>
-      </p:sp>
-      <p:sp>
-        <p:nvSpPr>
-          <p:cNvPr id="6" name="Shape 4"/>
-          <p:cNvSpPr/>
-          <p:nvPr/>
-        </p:nvSpPr>
-        <p:spPr>
-          <a:xfrm>
-            <a:off x="640080" y="1819656"/>
-            <a:ext cx="82296" cy="82296"/>
-          </a:xfrm>
-          <a:prstGeom prst="rect">
-            <a:avLst/>
-          </a:prstGeom>
-          <a:solidFill>
-            <a:srgbClr val="7C3AED"/>
-          </a:solidFill>
-          <a:ln/>
-        </p:spPr>
-      </p:sp>
-      <p:sp>
-        <p:nvSpPr>
-          <p:cNvPr id="7" name="Text 5"/>
-          <p:cNvSpPr/>
-          <p:nvPr/>
-        </p:nvSpPr>
-        <p:spPr>
-          <a:xfrm>
-            <a:off x="896112" y="1682496"/>
-            <a:ext cx="4773168" cy="292608"/>
-          </a:xfrm>
-          <a:prstGeom prst="rect">
-            <a:avLst/>
-          </a:prstGeom>
-          <a:noFill/>
-          <a:ln/>
-        </p:spPr>
-        <p:txBody>
-          <a:bodyPr wrap="square" rtlCol="0" anchor="ctr"/>
-          <a:lstStyle/>
-          <a:p>
-            <a:pPr indent="0" marL="0">
-              <a:buNone/>
-            </a:pPr>
-            <a:r>
-              <a:rPr lang="en-US" sz="1450" b="1" dirty="0">
-                <a:solidFill>
-                  <a:srgbClr val="1A1A2E"/>
-                </a:solidFill>
-                <a:latin typeface="Segoe UI" pitchFamily="34" charset="0"/>
-                <a:ea typeface="Segoe UI" pitchFamily="34" charset="-122"/>
-                <a:cs typeface="Segoe UI" pitchFamily="34" charset="-120"/>
-              </a:rPr>
-              <a:t>AGM Response</a:t>
-            </a:r>
-            <a:endParaRPr lang="en-US" sz="1450" dirty="0"/>
-          </a:p>
-        </p:txBody>
-      </p:sp>
-      <p:sp>
-        <p:nvSpPr>
-          <p:cNvPr id="8" name="Text 6"/>
-          <p:cNvSpPr/>
-          <p:nvPr/>
-        </p:nvSpPr>
-        <p:spPr>
-          <a:xfrm>
-            <a:off x="896112" y="1975104"/>
-            <a:ext cx="4773168" cy="566928"/>
-          </a:xfrm>
-          <a:prstGeom prst="rect">
-            <a:avLst/>
-          </a:prstGeom>
-          <a:noFill/>
-          <a:ln/>
-        </p:spPr>
-        <p:txBody>
-          <a:bodyPr wrap="square" rtlCol="0" anchor="ctr"/>
-          <a:lstStyle/>
-          <a:p>
-            <a:pPr indent="0" marL="0">
-              <a:lnSpc>
-                <a:spcPct val="115000"/>
-              </a:lnSpc>
-              <a:buNone/>
-            </a:pPr>
-            <a:r>
-              <a:rPr lang="en-US" sz="1150" dirty="0">
-                <a:solidFill>
-                  <a:srgbClr val="475569"/>
-                </a:solidFill>
-                <a:latin typeface="Segoe UI" pitchFamily="34" charset="0"/>
-                <a:ea typeface="Segoe UI" pitchFamily="34" charset="-122"/>
-                <a:cs typeface="Segoe UI" pitchFamily="34" charset="-120"/>
-              </a:rPr>
-              <a:t>Assigns the ticket to someone and commits a target date.</a:t>
-            </a:r>
-            <a:endParaRPr lang="en-US" sz="1150" dirty="0"/>
-          </a:p>
-        </p:txBody>
-      </p:sp>
-      <p:sp>
-        <p:nvSpPr>
-          <p:cNvPr id="9" name="Shape 7"/>
-          <p:cNvSpPr/>
-          <p:nvPr/>
-        </p:nvSpPr>
-        <p:spPr>
-          <a:xfrm>
-            <a:off x="640080" y="2752344"/>
-            <a:ext cx="82296" cy="82296"/>
-          </a:xfrm>
-          <a:prstGeom prst="rect">
-            <a:avLst/>
-          </a:prstGeom>
-          <a:solidFill>
-            <a:srgbClr val="7C3AED"/>
-          </a:solidFill>
-          <a:ln/>
-        </p:spPr>
-      </p:sp>
-      <p:sp>
-        <p:nvSpPr>
-          <p:cNvPr id="10" name="Text 8"/>
-          <p:cNvSpPr/>
-          <p:nvPr/>
-        </p:nvSpPr>
-        <p:spPr>
-          <a:xfrm>
-            <a:off x="896112" y="2615184"/>
-            <a:ext cx="4773168" cy="292608"/>
-          </a:xfrm>
-          <a:prstGeom prst="rect">
-            <a:avLst/>
-          </a:prstGeom>
-          <a:noFill/>
-          <a:ln/>
-        </p:spPr>
-        <p:txBody>
-          <a:bodyPr wrap="square" rtlCol="0" anchor="ctr"/>
-          <a:lstStyle/>
-          <a:p>
-            <a:pPr indent="0" marL="0">
-              <a:buNone/>
-            </a:pPr>
-            <a:r>
-              <a:rPr lang="en-US" sz="1450" b="1" dirty="0">
-                <a:solidFill>
-                  <a:srgbClr val="1A1A2E"/>
-                </a:solidFill>
-                <a:latin typeface="Segoe UI" pitchFamily="34" charset="0"/>
-                <a:ea typeface="Segoe UI" pitchFamily="34" charset="-122"/>
-                <a:cs typeface="Segoe UI" pitchFamily="34" charset="-120"/>
-              </a:rPr>
-              <a:t>GM — Priority</a:t>
-            </a:r>
-            <a:endParaRPr lang="en-US" sz="1450" dirty="0"/>
-          </a:p>
-        </p:txBody>
-      </p:sp>
-      <p:sp>
-        <p:nvSpPr>
-          <p:cNvPr id="11" name="Text 9"/>
-          <p:cNvSpPr/>
-          <p:nvPr/>
-        </p:nvSpPr>
-        <p:spPr>
-          <a:xfrm>
-            <a:off x="896112" y="2907792"/>
-            <a:ext cx="4773168" cy="566928"/>
-          </a:xfrm>
-          <a:prstGeom prst="rect">
-            <a:avLst/>
-          </a:prstGeom>
-          <a:noFill/>
-          <a:ln/>
-        </p:spPr>
-        <p:txBody>
-          <a:bodyPr wrap="square" rtlCol="0" anchor="ctr"/>
-          <a:lstStyle/>
-          <a:p>
-            <a:pPr indent="0" marL="0">
-              <a:lnSpc>
-                <a:spcPct val="115000"/>
-              </a:lnSpc>
-              <a:buNone/>
-            </a:pPr>
-            <a:r>
-              <a:rPr lang="en-US" sz="1150" dirty="0">
-                <a:solidFill>
-                  <a:srgbClr val="475569"/>
-                </a:solidFill>
-                <a:latin typeface="Segoe UI" pitchFamily="34" charset="0"/>
-                <a:ea typeface="Segoe UI" pitchFamily="34" charset="-122"/>
-                <a:cs typeface="Segoe UI" pitchFamily="34" charset="-120"/>
-              </a:rPr>
-              <a:t>Sets how urgently it needs to move.</a:t>
-            </a:r>
-            <a:endParaRPr lang="en-US" sz="1150" dirty="0"/>
-          </a:p>
-        </p:txBody>
-      </p:sp>
-      <p:sp>
-        <p:nvSpPr>
-          <p:cNvPr id="12" name="Shape 10"/>
-          <p:cNvSpPr/>
-          <p:nvPr/>
-        </p:nvSpPr>
-        <p:spPr>
-          <a:xfrm>
-            <a:off x="640080" y="3685032"/>
-            <a:ext cx="82296" cy="82296"/>
-          </a:xfrm>
-          <a:prstGeom prst="rect">
-            <a:avLst/>
-          </a:prstGeom>
-          <a:solidFill>
-            <a:srgbClr val="7C3AED"/>
-          </a:solidFill>
-          <a:ln/>
-        </p:spPr>
-      </p:sp>
-      <p:sp>
-        <p:nvSpPr>
-          <p:cNvPr id="13" name="Text 11"/>
-          <p:cNvSpPr/>
-          <p:nvPr/>
-        </p:nvSpPr>
-        <p:spPr>
-          <a:xfrm>
-            <a:off x="896112" y="3547872"/>
-            <a:ext cx="4773168" cy="292608"/>
-          </a:xfrm>
-          <a:prstGeom prst="rect">
-            <a:avLst/>
-          </a:prstGeom>
-          <a:noFill/>
-          <a:ln/>
-        </p:spPr>
-        <p:txBody>
-          <a:bodyPr wrap="square" rtlCol="0" anchor="ctr"/>
-          <a:lstStyle/>
-          <a:p>
-            <a:pPr indent="0" marL="0">
-              <a:buNone/>
-            </a:pPr>
-            <a:r>
-              <a:rPr lang="en-US" sz="1450" b="1" dirty="0">
-                <a:solidFill>
-                  <a:srgbClr val="1A1A2E"/>
-                </a:solidFill>
-                <a:latin typeface="Segoe UI" pitchFamily="34" charset="0"/>
-                <a:ea typeface="Segoe UI" pitchFamily="34" charset="-122"/>
-                <a:cs typeface="Segoe UI" pitchFamily="34" charset="-120"/>
-              </a:rPr>
-              <a:t>Planning — Status</a:t>
-            </a:r>
-            <a:endParaRPr lang="en-US" sz="1450" dirty="0"/>
-          </a:p>
-        </p:txBody>
-      </p:sp>
-      <p:sp>
-        <p:nvSpPr>
-          <p:cNvPr id="14" name="Text 12"/>
-          <p:cNvSpPr/>
-          <p:nvPr/>
-        </p:nvSpPr>
-        <p:spPr>
-          <a:xfrm>
-            <a:off x="896112" y="3840480"/>
-            <a:ext cx="4773168" cy="566928"/>
-          </a:xfrm>
-          <a:prstGeom prst="rect">
-            <a:avLst/>
-          </a:prstGeom>
-          <a:noFill/>
-          <a:ln/>
-        </p:spPr>
-        <p:txBody>
-          <a:bodyPr wrap="square" rtlCol="0" anchor="ctr"/>
-          <a:lstStyle/>
-          <a:p>
-            <a:pPr indent="0" marL="0">
-              <a:lnSpc>
-                <a:spcPct val="115000"/>
-              </a:lnSpc>
-              <a:buNone/>
-            </a:pPr>
-            <a:r>
-              <a:rPr lang="en-US" sz="1150" dirty="0">
-                <a:solidFill>
-                  <a:srgbClr val="475569"/>
-                </a:solidFill>
-                <a:latin typeface="Segoe UI" pitchFamily="34" charset="0"/>
-                <a:ea typeface="Segoe UI" pitchFamily="34" charset="-122"/>
-                <a:cs typeface="Segoe UI" pitchFamily="34" charset="-120"/>
-              </a:rPr>
-              <a:t>Updates progress through to an actual completion date.</a:t>
-            </a:r>
-            <a:endParaRPr lang="en-US" sz="1150" dirty="0"/>
-          </a:p>
-        </p:txBody>
-      </p:sp>
-      <p:sp>
-        <p:nvSpPr>
-          <p:cNvPr id="15" name="Shape 13"/>
-          <p:cNvSpPr/>
-          <p:nvPr/>
-        </p:nvSpPr>
-        <p:spPr>
-          <a:xfrm>
-            <a:off x="640080" y="4617720"/>
-            <a:ext cx="82296" cy="82296"/>
-          </a:xfrm>
-          <a:prstGeom prst="rect">
-            <a:avLst/>
-          </a:prstGeom>
-          <a:solidFill>
-            <a:srgbClr val="7C3AED"/>
-          </a:solidFill>
-          <a:ln/>
-        </p:spPr>
-      </p:sp>
-      <p:sp>
-        <p:nvSpPr>
-          <p:cNvPr id="16" name="Text 14"/>
-          <p:cNvSpPr/>
-          <p:nvPr/>
-        </p:nvSpPr>
-        <p:spPr>
-          <a:xfrm>
-            <a:off x="896112" y="4480560"/>
-            <a:ext cx="4773168" cy="292608"/>
-          </a:xfrm>
-          <a:prstGeom prst="rect">
-            <a:avLst/>
-          </a:prstGeom>
-          <a:noFill/>
-          <a:ln/>
-        </p:spPr>
-        <p:txBody>
-          <a:bodyPr wrap="square" rtlCol="0" anchor="ctr"/>
-          <a:lstStyle/>
-          <a:p>
-            <a:pPr indent="0" marL="0">
-              <a:buNone/>
-            </a:pPr>
-            <a:r>
-              <a:rPr lang="en-US" sz="1450" b="1" dirty="0">
-                <a:solidFill>
-                  <a:srgbClr val="1A1A2E"/>
-                </a:solidFill>
-                <a:latin typeface="Segoe UI" pitchFamily="34" charset="0"/>
-                <a:ea typeface="Segoe UI" pitchFamily="34" charset="-122"/>
-                <a:cs typeface="Segoe UI" pitchFamily="34" charset="-120"/>
-              </a:rPr>
-              <a:t>Verification</a:t>
-            </a:r>
-            <a:endParaRPr lang="en-US" sz="1450" dirty="0"/>
-          </a:p>
-        </p:txBody>
-      </p:sp>
-      <p:sp>
-        <p:nvSpPr>
-          <p:cNvPr id="17" name="Text 15"/>
-          <p:cNvSpPr/>
-          <p:nvPr/>
-        </p:nvSpPr>
-        <p:spPr>
-          <a:xfrm>
-            <a:off x="896112" y="4773168"/>
-            <a:ext cx="4773168" cy="566928"/>
-          </a:xfrm>
-          <a:prstGeom prst="rect">
-            <a:avLst/>
-          </a:prstGeom>
-          <a:noFill/>
-          <a:ln/>
-        </p:spPr>
-        <p:txBody>
-          <a:bodyPr wrap="square" rtlCol="0" anchor="ctr"/>
-          <a:lstStyle/>
-          <a:p>
-            <a:pPr indent="0" marL="0">
-              <a:lnSpc>
-                <a:spcPct val="115000"/>
-              </a:lnSpc>
-              <a:buNone/>
-            </a:pPr>
-            <a:r>
-              <a:rPr lang="en-US" sz="1150" dirty="0">
-                <a:solidFill>
-                  <a:srgbClr val="475569"/>
-                </a:solidFill>
-                <a:latin typeface="Segoe UI" pitchFamily="34" charset="0"/>
-                <a:ea typeface="Segoe UI" pitchFamily="34" charset="-122"/>
-                <a:cs typeface="Segoe UI" pitchFamily="34" charset="-120"/>
-              </a:rPr>
-              <a:t>Planning and the project team both confirm it's genuinely resolved.</a:t>
-            </a:r>
-            <a:endParaRPr lang="en-US" sz="1150" dirty="0"/>
-          </a:p>
-        </p:txBody>
-      </p:sp>
-      <p:pic>
-        <p:nvPicPr>
-          <p:cNvPr id="18" name="Image 0" descr="shots/16_drawing_request_edit_modal.png">    </p:cNvPr>
-          <p:cNvPicPr>
-            <a:picLocks noChangeAspect="1"/>
-          </p:cNvPicPr>
-          <p:nvPr/>
-        </p:nvPicPr>
-        <p:blipFill>
-          <a:blip r:embed="rId1"/>
-          <a:stretch>
-            <a:fillRect/>
-          </a:stretch>
-        </p:blipFill>
-        <p:spPr>
-          <a:xfrm>
-            <a:off x="5989320" y="1600200"/>
-            <a:ext cx="5669280" cy="4663440"/>
-          </a:xfrm>
-          <a:prstGeom prst="rect">
-            <a:avLst/>
-          </a:prstGeom>
-          <a:effectLst>
-            <a:outerShdw sx="100000" sy="100000" kx="0" ky="0" algn="bl" rotWithShape="0" blurRad="228600" dist="76200" dir="5400000">
-              <a:srgbClr val="1A1A2E">
-                <a:alpha val="35000"/>
-              </a:srgbClr>
-            </a:outerShdw>
-          </a:effectLst>
-        </p:spPr>
-      </p:pic>
-      <p:sp>
-        <p:nvSpPr>
-          <p:cNvPr id="19" name="Text 16"/>
-          <p:cNvSpPr/>
-          <p:nvPr/>
-        </p:nvSpPr>
-        <p:spPr>
-          <a:xfrm>
-            <a:off x="457200" y="6547104"/>
-            <a:ext cx="5486400" cy="274320"/>
-          </a:xfrm>
-          <a:prstGeom prst="rect">
-            <a:avLst/>
-          </a:prstGeom>
-          <a:noFill/>
-          <a:ln/>
-        </p:spPr>
-        <p:txBody>
-          <a:bodyPr wrap="square" rtlCol="0" anchor="ctr"/>
-          <a:lstStyle/>
-          <a:p>
-            <a:pPr indent="0" marL="0">
-              <a:buNone/>
-            </a:pPr>
-            <a:r>
-              <a:rPr lang="en-US" sz="900" dirty="0">
-                <a:solidFill>
-                  <a:srgbClr val="94A3B8"/>
-                </a:solidFill>
-                <a:latin typeface="Segoe UI" pitchFamily="34" charset="0"/>
-                <a:ea typeface="Segoe UI" pitchFamily="34" charset="-122"/>
-                <a:cs typeface="Segoe UI" pitchFamily="34" charset="-120"/>
-              </a:rPr>
-              <a:t>Nexora ERP  ·  DRI Dashboard Overview</a:t>
-            </a:r>
-            <a:endParaRPr lang="en-US" sz="900" dirty="0"/>
-          </a:p>
-        </p:txBody>
-      </p:sp>
-      <p:sp>
-        <p:nvSpPr>
-          <p:cNvPr id="20" name="Text 17"/>
-          <p:cNvSpPr/>
-          <p:nvPr/>
-        </p:nvSpPr>
-        <p:spPr>
-          <a:xfrm>
-            <a:off x="11521440" y="6547104"/>
-            <a:ext cx="365760" cy="274320"/>
-          </a:xfrm>
-          <a:prstGeom prst="rect">
-            <a:avLst/>
-          </a:prstGeom>
-          <a:noFill/>
-          <a:ln/>
-        </p:spPr>
-        <p:txBody>
-          <a:bodyPr wrap="square" rtlCol="0" anchor="ctr"/>
-          <a:lstStyle/>
-          <a:p>
-            <a:pPr algn="r" indent="0" marL="0">
-              <a:buNone/>
-            </a:pPr>
-            <a:r>
-              <a:rPr lang="en-US" sz="900" dirty="0">
-                <a:solidFill>
-                  <a:srgbClr val="94A3B8"/>
-                </a:solidFill>
-                <a:latin typeface="Segoe UI" pitchFamily="34" charset="0"/>
-                <a:ea typeface="Segoe UI" pitchFamily="34" charset="-122"/>
-                <a:cs typeface="Segoe UI" pitchFamily="34" charset="-120"/>
-              </a:rPr>
-              <a:t>13</a:t>
-            </a:r>
-            <a:endParaRPr lang="en-US" sz="900" dirty="0"/>
-          </a:p>
-        </p:txBody>
-      </p:sp>
-    </p:spTree>
-  </p:cSld>
-  <p:clrMapOvr>
-    <a:masterClrMapping/>
-  </p:clrMapOvr>
-</p:sld>
-</file>
-
-<file path=ppt/slides/slide14.xml><?xml version="1.0" encoding="utf-8"?>
-<p:sld xmlns:a="http://schemas.openxmlformats.org/drawingml/2006/main" xmlns:r="http://schemas.openxmlformats.org/officeDocument/2006/relationships" xmlns:p="http://schemas.openxmlformats.org/presentationml/2006/main">
-  <p:cSld name="Slide 14">
     <p:bg>
       <p:bgPr>
         <a:solidFill>
@@ -4604,7 +3527,7 @@
                 <a:ea typeface="Segoe UI" pitchFamily="34" charset="-122"/>
                 <a:cs typeface="Segoe UI" pitchFamily="34" charset="-120"/>
               </a:rPr>
-              <a:t>One dashboard, three connected workflows</a:t>
+              <a:t>One dashboard, two connected workflows</a:t>
             </a:r>
             <a:endParaRPr lang="en-US" sz="3400" dirty="0"/>
           </a:p>
@@ -4646,7 +3569,7 @@
                 <a:ea typeface="Segoe UI" pitchFamily="34" charset="-122"/>
                 <a:cs typeface="Segoe UI" pitchFamily="34" charset="-120"/>
               </a:rPr>
-              <a:t>Project Wise Progress feeds billing. Daily Progress Reports build the site's photographic record. Drawing Requests keep Planning and the site in sync.</a:t>
+              <a:t>Daily Progress Reports build the site's photographic record. Drawing Requests keep Planning and the site in sync.</a:t>
             </a:r>
             <a:endParaRPr lang="en-US" sz="1500" dirty="0"/>
           </a:p>
@@ -4763,7 +3686,7 @@
                 <a:ea typeface="Segoe UI" pitchFamily="34" charset="-122"/>
                 <a:cs typeface="Segoe UI" pitchFamily="34" charset="-120"/>
               </a:rPr>
-              <a:t>14</a:t>
+              <a:t>10</a:t>
             </a:r>
             <a:endParaRPr lang="en-US" sz="900" dirty="0"/>
           </a:p>
@@ -4873,7 +3796,7 @@
                 <a:ea typeface="Segoe UI" pitchFamily="34" charset="-122"/>
                 <a:cs typeface="Segoe UI" pitchFamily="34" charset="-120"/>
               </a:rPr>
-              <a:t>Three connected workflows a Site DRI uses every day</a:t>
+              <a:t>Two connected workflows a Site DRI uses every day</a:t>
             </a:r>
             <a:endParaRPr lang="en-US" sz="1400" dirty="0"/>
           </a:p>
@@ -4887,12 +3810,12 @@
         </p:nvSpPr>
         <p:spPr>
           <a:xfrm>
-            <a:off x="731520" y="1737360"/>
-            <a:ext cx="3429000" cy="4297680"/>
+            <a:off x="704088" y="1737360"/>
+            <a:ext cx="5120640" cy="4297680"/>
           </a:xfrm>
           <a:prstGeom prst="roundRect">
             <a:avLst>
-              <a:gd name="adj" fmla="val 3200"/>
+              <a:gd name="adj" fmla="val 2553"/>
             </a:avLst>
           </a:prstGeom>
           <a:solidFill>
@@ -4921,14 +3844,14 @@
         </p:nvSpPr>
         <p:spPr>
           <a:xfrm>
-            <a:off x="731520" y="1737360"/>
-            <a:ext cx="3429000" cy="128016"/>
+            <a:off x="704088" y="1737360"/>
+            <a:ext cx="5120640" cy="128016"/>
           </a:xfrm>
           <a:prstGeom prst="rect">
             <a:avLst/>
           </a:prstGeom>
           <a:solidFill>
-            <a:srgbClr val="FF7A00"/>
+            <a:srgbClr val="4F46E5"/>
           </a:solidFill>
           <a:ln/>
         </p:spPr>
@@ -4941,7 +3864,7 @@
         </p:nvSpPr>
         <p:spPr>
           <a:xfrm>
-            <a:off x="1051560" y="2057400"/>
+            <a:off x="1024128" y="2057400"/>
             <a:ext cx="1828800" cy="640080"/>
           </a:xfrm>
           <a:prstGeom prst="rect">
@@ -4960,7 +3883,7 @@
             <a:r>
               <a:rPr lang="en-US" sz="3400" b="1" dirty="0">
                 <a:solidFill>
-                  <a:srgbClr val="FF7A00">
+                  <a:srgbClr val="4F46E5">
                     <a:alpha val="75000"/>
                   </a:srgbClr>
                 </a:solidFill>
@@ -4982,8 +3905,8 @@
         </p:nvSpPr>
         <p:spPr>
           <a:xfrm>
-            <a:off x="1051560" y="2788920"/>
-            <a:ext cx="2788920" cy="685800"/>
+            <a:off x="1024128" y="2788920"/>
+            <a:ext cx="4480560" cy="685800"/>
           </a:xfrm>
           <a:prstGeom prst="rect">
             <a:avLst/>
@@ -5007,7 +3930,7 @@
                 <a:ea typeface="Segoe UI" pitchFamily="34" charset="-122"/>
                 <a:cs typeface="Segoe UI" pitchFamily="34" charset="-120"/>
               </a:rPr>
-              <a:t>Project Wise Progress</a:t>
+              <a:t>Daily Progress Report</a:t>
             </a:r>
             <a:endParaRPr lang="en-US" sz="1800" dirty="0"/>
           </a:p>
@@ -5021,8 +3944,8 @@
         </p:nvSpPr>
         <p:spPr>
           <a:xfrm>
-            <a:off x="1051560" y="3429000"/>
-            <a:ext cx="2788920" cy="2286000"/>
+            <a:off x="1024128" y="3429000"/>
+            <a:ext cx="4480560" cy="2286000"/>
           </a:xfrm>
           <a:prstGeom prst="rect">
             <a:avLst/>
@@ -5049,7 +3972,7 @@
                 <a:ea typeface="Segoe UI" pitchFamily="34" charset="-122"/>
                 <a:cs typeface="Segoe UI" pitchFamily="34" charset="-120"/>
               </a:rPr>
-              <a:t>Pick a project, log today's measured quantity against each scope item, and watch billing-ready progress build up automatically.</a:t>
+              <a:t>One end-of-day form: project, contractor, shift, labour count, and a work-type checklist backed by photo evidence.</a:t>
             </a:r>
             <a:endParaRPr lang="en-US" sz="1200" dirty="0"/>
           </a:p>
@@ -5063,12 +3986,12 @@
         </p:nvSpPr>
         <p:spPr>
           <a:xfrm>
-            <a:off x="4480560" y="1737360"/>
-            <a:ext cx="3429000" cy="4297680"/>
+            <a:off x="6373368" y="1737360"/>
+            <a:ext cx="5120640" cy="4297680"/>
           </a:xfrm>
           <a:prstGeom prst="roundRect">
             <a:avLst>
-              <a:gd name="adj" fmla="val 3200"/>
+              <a:gd name="adj" fmla="val 2553"/>
             </a:avLst>
           </a:prstGeom>
           <a:solidFill>
@@ -5097,14 +4020,14 @@
         </p:nvSpPr>
         <p:spPr>
           <a:xfrm>
-            <a:off x="4480560" y="1737360"/>
-            <a:ext cx="3429000" cy="128016"/>
+            <a:off x="6373368" y="1737360"/>
+            <a:ext cx="5120640" cy="128016"/>
           </a:xfrm>
           <a:prstGeom prst="rect">
             <a:avLst/>
           </a:prstGeom>
           <a:solidFill>
-            <a:srgbClr val="4F46E5"/>
+            <a:srgbClr val="7C3AED"/>
           </a:solidFill>
           <a:ln/>
         </p:spPr>
@@ -5117,7 +4040,7 @@
         </p:nvSpPr>
         <p:spPr>
           <a:xfrm>
-            <a:off x="4800600" y="2057400"/>
+            <a:off x="6693408" y="2057400"/>
             <a:ext cx="1828800" cy="640080"/>
           </a:xfrm>
           <a:prstGeom prst="rect">
@@ -5136,7 +4059,7 @@
             <a:r>
               <a:rPr lang="en-US" sz="3400" b="1" dirty="0">
                 <a:solidFill>
-                  <a:srgbClr val="4F46E5">
+                  <a:srgbClr val="7C3AED">
                     <a:alpha val="75000"/>
                   </a:srgbClr>
                 </a:solidFill>
@@ -5158,8 +4081,8 @@
         </p:nvSpPr>
         <p:spPr>
           <a:xfrm>
-            <a:off x="4800600" y="2788920"/>
-            <a:ext cx="2788920" cy="685800"/>
+            <a:off x="6693408" y="2788920"/>
+            <a:ext cx="4480560" cy="685800"/>
           </a:xfrm>
           <a:prstGeom prst="rect">
             <a:avLst/>
@@ -5183,7 +4106,7 @@
                 <a:ea typeface="Segoe UI" pitchFamily="34" charset="-122"/>
                 <a:cs typeface="Segoe UI" pitchFamily="34" charset="-120"/>
               </a:rPr>
-              <a:t>Daily Progress Report</a:t>
+              <a:t>Drawing Requests</a:t>
             </a:r>
             <a:endParaRPr lang="en-US" sz="1800" dirty="0"/>
           </a:p>
@@ -5197,8 +4120,8 @@
         </p:nvSpPr>
         <p:spPr>
           <a:xfrm>
-            <a:off x="4800600" y="3429000"/>
-            <a:ext cx="2788920" cy="2286000"/>
+            <a:off x="6693408" y="3429000"/>
+            <a:ext cx="4480560" cy="2286000"/>
           </a:xfrm>
           <a:prstGeom prst="rect">
             <a:avLst/>
@@ -5225,7 +4148,7 @@
                 <a:ea typeface="Segoe UI" pitchFamily="34" charset="-122"/>
                 <a:cs typeface="Segoe UI" pitchFamily="34" charset="-120"/>
               </a:rPr>
-              <a:t>One end-of-day form: project, contractor, shift, labour count, and a work-type checklist backed by photo evidence.</a:t>
+              <a:t>Raise a ticket for a missing drawing right from the report — then track it through AGM, GM, and Planning until it's resolved.</a:t>
             </a:r>
             <a:endParaRPr lang="en-US" sz="1200" dirty="0"/>
           </a:p>
@@ -5233,183 +4156,7 @@
       </p:sp>
       <p:sp>
         <p:nvSpPr>
-          <p:cNvPr id="14" name="Shape 12"/>
-          <p:cNvSpPr/>
-          <p:nvPr/>
-        </p:nvSpPr>
-        <p:spPr>
-          <a:xfrm>
-            <a:off x="8229600" y="1737360"/>
-            <a:ext cx="3429000" cy="4297680"/>
-          </a:xfrm>
-          <a:prstGeom prst="roundRect">
-            <a:avLst>
-              <a:gd name="adj" fmla="val 3200"/>
-            </a:avLst>
-          </a:prstGeom>
-          <a:solidFill>
-            <a:srgbClr val="FFFFFF"/>
-          </a:solidFill>
-          <a:ln w="12700">
-            <a:solidFill>
-              <a:srgbClr val="E5E7EB"/>
-            </a:solidFill>
-            <a:prstDash val="solid"/>
-          </a:ln>
-          <a:effectLst>
-            <a:outerShdw sx="100000" sy="100000" kx="0" ky="0" algn="bl" rotWithShape="0" blurRad="228600" dist="76200" dir="5400000">
-              <a:srgbClr val="1A1A2E">
-                <a:alpha val="35000"/>
-              </a:srgbClr>
-            </a:outerShdw>
-          </a:effectLst>
-        </p:spPr>
-      </p:sp>
-      <p:sp>
-        <p:nvSpPr>
-          <p:cNvPr id="15" name="Shape 13"/>
-          <p:cNvSpPr/>
-          <p:nvPr/>
-        </p:nvSpPr>
-        <p:spPr>
-          <a:xfrm>
-            <a:off x="8229600" y="1737360"/>
-            <a:ext cx="3429000" cy="128016"/>
-          </a:xfrm>
-          <a:prstGeom prst="rect">
-            <a:avLst/>
-          </a:prstGeom>
-          <a:solidFill>
-            <a:srgbClr val="7C3AED"/>
-          </a:solidFill>
-          <a:ln/>
-        </p:spPr>
-      </p:sp>
-      <p:sp>
-        <p:nvSpPr>
-          <p:cNvPr id="16" name="Text 14"/>
-          <p:cNvSpPr/>
-          <p:nvPr/>
-        </p:nvSpPr>
-        <p:spPr>
-          <a:xfrm>
-            <a:off x="8549640" y="2057400"/>
-            <a:ext cx="1828800" cy="640080"/>
-          </a:xfrm>
-          <a:prstGeom prst="rect">
-            <a:avLst/>
-          </a:prstGeom>
-          <a:noFill/>
-          <a:ln/>
-        </p:spPr>
-        <p:txBody>
-          <a:bodyPr wrap="square" rtlCol="0" anchor="ctr"/>
-          <a:lstStyle/>
-          <a:p>
-            <a:pPr indent="0" marL="0">
-              <a:buNone/>
-            </a:pPr>
-            <a:r>
-              <a:rPr lang="en-US" sz="3400" b="1" dirty="0">
-                <a:solidFill>
-                  <a:srgbClr val="7C3AED">
-                    <a:alpha val="75000"/>
-                  </a:srgbClr>
-                </a:solidFill>
-                <a:latin typeface="Segoe UI" pitchFamily="34" charset="0"/>
-                <a:ea typeface="Segoe UI" pitchFamily="34" charset="-122"/>
-                <a:cs typeface="Segoe UI" pitchFamily="34" charset="-120"/>
-              </a:rPr>
-              <a:t>03</a:t>
-            </a:r>
-            <a:endParaRPr lang="en-US" sz="3400" dirty="0"/>
-          </a:p>
-        </p:txBody>
-      </p:sp>
-      <p:sp>
-        <p:nvSpPr>
-          <p:cNvPr id="17" name="Text 15"/>
-          <p:cNvSpPr/>
-          <p:nvPr/>
-        </p:nvSpPr>
-        <p:spPr>
-          <a:xfrm>
-            <a:off x="8549640" y="2788920"/>
-            <a:ext cx="2788920" cy="685800"/>
-          </a:xfrm>
-          <a:prstGeom prst="rect">
-            <a:avLst/>
-          </a:prstGeom>
-          <a:noFill/>
-          <a:ln/>
-        </p:spPr>
-        <p:txBody>
-          <a:bodyPr wrap="square" rtlCol="0" anchor="ctr"/>
-          <a:lstStyle/>
-          <a:p>
-            <a:pPr indent="0" marL="0">
-              <a:buNone/>
-            </a:pPr>
-            <a:r>
-              <a:rPr lang="en-US" sz="1800" b="1" dirty="0">
-                <a:solidFill>
-                  <a:srgbClr val="1A1A2E"/>
-                </a:solidFill>
-                <a:latin typeface="Segoe UI" pitchFamily="34" charset="0"/>
-                <a:ea typeface="Segoe UI" pitchFamily="34" charset="-122"/>
-                <a:cs typeface="Segoe UI" pitchFamily="34" charset="-120"/>
-              </a:rPr>
-              <a:t>Drawing Requests</a:t>
-            </a:r>
-            <a:endParaRPr lang="en-US" sz="1800" dirty="0"/>
-          </a:p>
-        </p:txBody>
-      </p:sp>
-      <p:sp>
-        <p:nvSpPr>
-          <p:cNvPr id="18" name="Text 16"/>
-          <p:cNvSpPr/>
-          <p:nvPr/>
-        </p:nvSpPr>
-        <p:spPr>
-          <a:xfrm>
-            <a:off x="8549640" y="3429000"/>
-            <a:ext cx="2788920" cy="2286000"/>
-          </a:xfrm>
-          <a:prstGeom prst="rect">
-            <a:avLst/>
-          </a:prstGeom>
-          <a:noFill/>
-          <a:ln/>
-        </p:spPr>
-        <p:txBody>
-          <a:bodyPr wrap="square" rtlCol="0" anchor="ctr"/>
-          <a:lstStyle/>
-          <a:p>
-            <a:pPr indent="0" marL="0">
-              <a:lnSpc>
-                <a:spcPct val="125000"/>
-              </a:lnSpc>
-              <a:buNone/>
-            </a:pPr>
-            <a:r>
-              <a:rPr lang="en-US" sz="1200" dirty="0">
-                <a:solidFill>
-                  <a:srgbClr val="475569"/>
-                </a:solidFill>
-                <a:latin typeface="Segoe UI" pitchFamily="34" charset="0"/>
-                <a:ea typeface="Segoe UI" pitchFamily="34" charset="-122"/>
-                <a:cs typeface="Segoe UI" pitchFamily="34" charset="-120"/>
-              </a:rPr>
-              <a:t>Raise a ticket for a missing drawing right from the report — then track it through AGM, GM, and Planning until it's resolved.</a:t>
-            </a:r>
-            <a:endParaRPr lang="en-US" sz="1200" dirty="0"/>
-          </a:p>
-        </p:txBody>
-      </p:sp>
-      <p:sp>
-        <p:nvSpPr>
-          <p:cNvPr id="19" name="Text 17"/>
+          <p:cNvPr id="14" name="Text 12"/>
           <p:cNvSpPr/>
           <p:nvPr/>
         </p:nvSpPr>
@@ -5448,7 +4195,7 @@
       </p:sp>
       <p:sp>
         <p:nvSpPr>
-          <p:cNvPr id="20" name="Text 18"/>
+          <p:cNvPr id="15" name="Text 13"/>
           <p:cNvSpPr/>
           <p:nvPr/>
         </p:nvSpPr>
@@ -5499,7 +4246,7 @@
     <p:bg>
       <p:bgPr>
         <a:solidFill>
-          <a:srgbClr val="FF7A00"/>
+          <a:srgbClr val="4F46E5"/>
         </a:solidFill>
       </p:bgPr>
     </p:bg>
@@ -5611,7 +4358,7 @@
                 <a:ea typeface="Segoe UI" pitchFamily="34" charset="-122"/>
                 <a:cs typeface="Segoe UI" pitchFamily="34" charset="-120"/>
               </a:rPr>
-              <a:t>Project Wise Progress</a:t>
+              <a:t>Daily Progress Report</a:t>
             </a:r>
             <a:endParaRPr lang="en-US" sz="4000" dirty="0"/>
           </a:p>
@@ -5652,7 +4399,7 @@
                 <a:ea typeface="Segoe UI" pitchFamily="34" charset="-122"/>
                 <a:cs typeface="Segoe UI" pitchFamily="34" charset="-120"/>
               </a:rPr>
-              <a:t>Log today's measured quantity, project by project, scope item by scope item.</a:t>
+              <a:t>One end-of-day form — project, contractor, shift, labour, and photo-backed work-type checklist.</a:t>
             </a:r>
             <a:endParaRPr lang="en-US" sz="1500" dirty="0"/>
           </a:p>
@@ -5705,7 +4452,7 @@
             <a:avLst/>
           </a:prstGeom>
           <a:solidFill>
-            <a:srgbClr val="FF7A00"/>
+            <a:srgbClr val="4F46E5"/>
           </a:solidFill>
           <a:ln/>
         </p:spPr>
@@ -5763,7 +4510,7 @@
                 <a:ea typeface="Segoe UI" pitchFamily="34" charset="-122"/>
                 <a:cs typeface="Segoe UI" pitchFamily="34" charset="-120"/>
               </a:rPr>
-              <a:t>Project Wise Progress</a:t>
+              <a:t>Daily Progress Report — Overview</a:t>
             </a:r>
             <a:endParaRPr lang="en-US" sz="2400" dirty="0"/>
           </a:p>
@@ -5804,7 +4551,7 @@
                 <a:ea typeface="Segoe UI" pitchFamily="34" charset="-122"/>
                 <a:cs typeface="Segoe UI" pitchFamily="34" charset="-120"/>
               </a:rPr>
-              <a:t>Filter by project and category to pull up every work order that needs a measurement logged today.</a:t>
+              <a:t>Replaces two separate paper-style reports with a single, photo-verified daily submission.</a:t>
             </a:r>
             <a:endParaRPr lang="en-US" sz="1250" dirty="0"/>
           </a:p>
@@ -5825,7 +4572,7 @@
             <a:avLst/>
           </a:prstGeom>
           <a:solidFill>
-            <a:srgbClr val="FF7A00"/>
+            <a:srgbClr val="4F46E5"/>
           </a:solidFill>
           <a:ln/>
         </p:spPr>
@@ -5863,7 +4610,7 @@
                 <a:ea typeface="Segoe UI" pitchFamily="34" charset="-122"/>
                 <a:cs typeface="Segoe UI" pitchFamily="34" charset="-120"/>
               </a:rPr>
-              <a:t>Pick a project &amp; category</a:t>
+              <a:t>One submission per site day</a:t>
             </a:r>
             <a:endParaRPr lang="en-US" sz="1450" dirty="0"/>
           </a:p>
@@ -5905,7 +4652,7 @@
                 <a:ea typeface="Segoe UI" pitchFamily="34" charset="-122"/>
                 <a:cs typeface="Segoe UI" pitchFamily="34" charset="-120"/>
               </a:rPr>
-              <a:t>Filters narrow 200+ live work orders down to exactly what's relevant for today's site visit.</a:t>
+              <a:t>Project, DRI name, date, contractor, shift, and today's labour count — all in one place.</a:t>
             </a:r>
             <a:endParaRPr lang="en-US" sz="1150" dirty="0"/>
           </a:p>
@@ -5926,7 +4673,7 @@
             <a:avLst/>
           </a:prstGeom>
           <a:solidFill>
-            <a:srgbClr val="FF7A00"/>
+            <a:srgbClr val="4F46E5"/>
           </a:solidFill>
           <a:ln/>
         </p:spPr>
@@ -5964,7 +4711,7 @@
                 <a:ea typeface="Segoe UI" pitchFamily="34" charset="-122"/>
                 <a:cs typeface="Segoe UI" pitchFamily="34" charset="-120"/>
               </a:rPr>
-              <a:t>See what's outstanding</a:t>
+              <a:t>Every report is listed</a:t>
             </a:r>
             <a:endParaRPr lang="en-US" sz="1450" dirty="0"/>
           </a:p>
@@ -6006,7 +4753,7 @@
                 <a:ea typeface="Segoe UI" pitchFamily="34" charset="-122"/>
                 <a:cs typeface="Segoe UI" pitchFamily="34" charset="-120"/>
               </a:rPr>
-              <a:t>Each work order card shows the contractor, category, and current contract value at a glance.</a:t>
+              <a:t>The Recent Reports table shows what's been logged, by whom, and how many categories were covered.</a:t>
             </a:r>
             <a:endParaRPr lang="en-US" sz="1150" dirty="0"/>
           </a:p>
@@ -6027,7 +4774,7 @@
             <a:avLst/>
           </a:prstGeom>
           <a:solidFill>
-            <a:srgbClr val="FF7A00"/>
+            <a:srgbClr val="4F46E5"/>
           </a:solidFill>
           <a:ln/>
         </p:spPr>
@@ -6065,7 +4812,7 @@
                 <a:ea typeface="Segoe UI" pitchFamily="34" charset="-122"/>
                 <a:cs typeface="Segoe UI" pitchFamily="34" charset="-120"/>
               </a:rPr>
-              <a:t>Drill into scope items</a:t>
+              <a:t>Raise a Drawing Request inline</a:t>
             </a:r>
             <a:endParaRPr lang="en-US" sz="1450" dirty="0"/>
           </a:p>
@@ -6107,7 +4854,7 @@
                 <a:ea typeface="Segoe UI" pitchFamily="34" charset="-122"/>
                 <a:cs typeface="Segoe UI" pitchFamily="34" charset="-120"/>
               </a:rPr>
-              <a:t>Open a work order to see every scope item's Planned / Done / Billed / Unbilled quantities side by side.</a:t>
+              <a:t>A DRI who hits a missing drawing while filling this out can raise it without leaving the page.</a:t>
             </a:r>
             <a:endParaRPr lang="en-US" sz="1150" dirty="0"/>
           </a:p>
@@ -6128,7 +4875,7 @@
             <a:avLst/>
           </a:prstGeom>
           <a:solidFill>
-            <a:srgbClr val="FF7A00"/>
+            <a:srgbClr val="4F46E5"/>
           </a:solidFill>
           <a:ln/>
         </p:spPr>
@@ -6166,7 +4913,7 @@
                 <a:ea typeface="Segoe UI" pitchFamily="34" charset="-122"/>
                 <a:cs typeface="Segoe UI" pitchFamily="34" charset="-120"/>
               </a:rPr>
-              <a:t>Log a measurement</a:t>
+              <a:t>Available two ways</a:t>
             </a:r>
             <a:endParaRPr lang="en-US" sz="1450" dirty="0"/>
           </a:p>
@@ -6208,7 +4955,7 @@
                 <a:ea typeface="Segoe UI" pitchFamily="34" charset="-122"/>
                 <a:cs typeface="Segoe UI" pitchFamily="34" charset="-120"/>
               </a:rPr>
-              <a:t>"+ Measurement" records today's quantity against the right item — it rolls straight into billing readiness.</a:t>
+              <a:t>Inside the app for logged-in DRIs/Admins, and as a public no-login form for anyone on site.</a:t>
             </a:r>
             <a:endParaRPr lang="en-US" sz="1150" dirty="0"/>
           </a:p>
@@ -6216,7 +4963,7 @@
       </p:sp>
       <p:pic>
         <p:nvPicPr>
-          <p:cNvPr id="18" name="Image 0" descr="shots/02_progress_project_dashboard.png">    </p:cNvPr>
+          <p:cNvPr id="18" name="Image 0" descr="shots/09_dpr_submitted_list.png">    </p:cNvPr>
           <p:cNvPicPr>
             <a:picLocks noChangeAspect="1"/>
           </p:cNvPicPr>
@@ -6317,7 +5064,7 @@
                 <a:ea typeface="Segoe UI" pitchFamily="34" charset="-122"/>
                 <a:cs typeface="Segoe UI" pitchFamily="34" charset="-120"/>
               </a:rPr>
-              <a:t>4</a:t>
+              <a:t>3</a:t>
             </a:r>
             <a:endParaRPr lang="en-US" sz="900" dirty="0"/>
           </a:p>
@@ -6337,7 +5084,7 @@
     <p:bg>
       <p:bgPr>
         <a:solidFill>
-          <a:srgbClr val="4F46E5"/>
+          <a:srgbClr val="FFFFFF"/>
         </a:solidFill>
       </p:bgPr>
     </p:bg>
@@ -6357,44 +5104,23 @@
       </p:grpSpPr>
       <p:sp>
         <p:nvSpPr>
-          <p:cNvPr id="2" name="Text 0"/>
-          <p:cNvSpPr/>
-          <p:nvPr/>
-        </p:nvSpPr>
-        <p:spPr>
-          <a:xfrm>
-            <a:off x="822960" y="2011680"/>
-            <a:ext cx="2743200" cy="1463040"/>
-          </a:xfrm>
-          <a:prstGeom prst="rect">
-            <a:avLst/>
-          </a:prstGeom>
-          <a:noFill/>
-          <a:ln/>
-        </p:spPr>
-        <p:txBody>
-          <a:bodyPr wrap="square" rtlCol="0" anchor="ctr"/>
-          <a:lstStyle/>
-          <a:p>
-            <a:pPr indent="0" marL="0">
-              <a:buNone/>
-            </a:pPr>
-            <a:r>
-              <a:rPr lang="en-US" sz="9000" b="1" dirty="0">
-                <a:solidFill>
-                  <a:srgbClr val="FFFFFF">
-                    <a:alpha val="30000"/>
-                  </a:srgbClr>
-                </a:solidFill>
-                <a:latin typeface="Segoe UI" pitchFamily="34" charset="0"/>
-                <a:ea typeface="Segoe UI" pitchFamily="34" charset="-122"/>
-                <a:cs typeface="Segoe UI" pitchFamily="34" charset="-120"/>
-              </a:rPr>
-              <a:t>02</a:t>
-            </a:r>
-            <a:endParaRPr lang="en-US" sz="9000" dirty="0"/>
-          </a:p>
-        </p:txBody>
+          <p:cNvPr id="2" name="Shape 0"/>
+          <p:cNvSpPr/>
+          <p:nvPr/>
+        </p:nvSpPr>
+        <p:spPr>
+          <a:xfrm>
+            <a:off x="0" y="0"/>
+            <a:ext cx="12191695" cy="1234440"/>
+          </a:xfrm>
+          <a:prstGeom prst="rect">
+            <a:avLst/>
+          </a:prstGeom>
+          <a:solidFill>
+            <a:srgbClr val="4F46E5"/>
+          </a:solidFill>
+          <a:ln/>
+        </p:spPr>
       </p:sp>
       <p:sp>
         <p:nvSpPr>
@@ -6404,8 +5130,8 @@
         </p:nvSpPr>
         <p:spPr>
           <a:xfrm>
-            <a:off x="868680" y="3429000"/>
-            <a:ext cx="1280160" cy="64008"/>
+            <a:off x="502920" y="310896"/>
+            <a:ext cx="82296" cy="621792"/>
           </a:xfrm>
           <a:prstGeom prst="rect">
             <a:avLst/>
@@ -6424,24 +5150,24 @@
         </p:nvSpPr>
         <p:spPr>
           <a:xfrm>
-            <a:off x="822960" y="3611880"/>
-            <a:ext cx="10058400" cy="914400"/>
-          </a:xfrm>
-          <a:prstGeom prst="rect">
-            <a:avLst/>
-          </a:prstGeom>
-          <a:noFill/>
-          <a:ln/>
-        </p:spPr>
-        <p:txBody>
-          <a:bodyPr wrap="square" rtlCol="0" anchor="ctr"/>
-          <a:lstStyle/>
-          <a:p>
-            <a:pPr indent="0" marL="0">
-              <a:buNone/>
-            </a:pPr>
-            <a:r>
-              <a:rPr lang="en-US" sz="4000" b="1" dirty="0">
+            <a:off x="777240" y="237744"/>
+            <a:ext cx="9601200" cy="502920"/>
+          </a:xfrm>
+          <a:prstGeom prst="rect">
+            <a:avLst/>
+          </a:prstGeom>
+          <a:noFill/>
+          <a:ln/>
+        </p:spPr>
+        <p:txBody>
+          <a:bodyPr wrap="square" rtlCol="0" anchor="ctr"/>
+          <a:lstStyle/>
+          <a:p>
+            <a:pPr indent="0" marL="0">
+              <a:buNone/>
+            </a:pPr>
+            <a:r>
+              <a:rPr lang="en-US" sz="2400" b="1" dirty="0">
                 <a:solidFill>
                   <a:srgbClr val="FFFFFF"/>
                 </a:solidFill>
@@ -6449,9 +5175,9 @@
                 <a:ea typeface="Segoe UI" pitchFamily="34" charset="-122"/>
                 <a:cs typeface="Segoe UI" pitchFamily="34" charset="-120"/>
               </a:rPr>
-              <a:t>Daily Progress Report</a:t>
-            </a:r>
-            <a:endParaRPr lang="en-US" sz="4000" dirty="0"/>
+              <a:t>Filling In a Report</a:t>
+            </a:r>
+            <a:endParaRPr lang="en-US" sz="2400" dirty="0"/>
           </a:p>
         </p:txBody>
       </p:sp>
@@ -6463,24 +5189,24 @@
         </p:nvSpPr>
         <p:spPr>
           <a:xfrm>
-            <a:off x="822960" y="4434840"/>
-            <a:ext cx="9144000" cy="548640"/>
-          </a:xfrm>
-          <a:prstGeom prst="rect">
-            <a:avLst/>
-          </a:prstGeom>
-          <a:noFill/>
-          <a:ln/>
-        </p:spPr>
-        <p:txBody>
-          <a:bodyPr wrap="square" rtlCol="0" anchor="ctr"/>
-          <a:lstStyle/>
-          <a:p>
-            <a:pPr indent="0" marL="0">
-              <a:buNone/>
-            </a:pPr>
-            <a:r>
-              <a:rPr lang="en-US" sz="1500" dirty="0">
+            <a:off x="777240" y="713232"/>
+            <a:ext cx="10515600" cy="365760"/>
+          </a:xfrm>
+          <a:prstGeom prst="rect">
+            <a:avLst/>
+          </a:prstGeom>
+          <a:noFill/>
+          <a:ln/>
+        </p:spPr>
+        <p:txBody>
+          <a:bodyPr wrap="square" rtlCol="0" anchor="ctr"/>
+          <a:lstStyle/>
+          <a:p>
+            <a:pPr indent="0" marL="0">
+              <a:buNone/>
+            </a:pPr>
+            <a:r>
+              <a:rPr lang="en-US" sz="1250" dirty="0">
                 <a:solidFill>
                   <a:srgbClr val="FFFFFF">
                     <a:alpha val="85000"/>
@@ -6490,9 +5216,522 @@
                 <a:ea typeface="Segoe UI" pitchFamily="34" charset="-122"/>
                 <a:cs typeface="Segoe UI" pitchFamily="34" charset="-120"/>
               </a:rPr>
-              <a:t>One end-of-day form — project, contractor, shift, labour, and photo-backed work-type checklist.</a:t>
-            </a:r>
-            <a:endParaRPr lang="en-US" sz="1500" dirty="0"/>
+              <a:t>Report Details up top, the work-type checklist below — both in one wide, well-spaced drawer.</a:t>
+            </a:r>
+            <a:endParaRPr lang="en-US" sz="1250" dirty="0"/>
+          </a:p>
+        </p:txBody>
+      </p:sp>
+      <p:sp>
+        <p:nvSpPr>
+          <p:cNvPr id="6" name="Shape 4"/>
+          <p:cNvSpPr/>
+          <p:nvPr/>
+        </p:nvSpPr>
+        <p:spPr>
+          <a:xfrm>
+            <a:off x="640080" y="1819656"/>
+            <a:ext cx="82296" cy="82296"/>
+          </a:xfrm>
+          <a:prstGeom prst="rect">
+            <a:avLst/>
+          </a:prstGeom>
+          <a:solidFill>
+            <a:srgbClr val="4F46E5"/>
+          </a:solidFill>
+          <a:ln/>
+        </p:spPr>
+      </p:sp>
+      <p:sp>
+        <p:nvSpPr>
+          <p:cNvPr id="7" name="Text 5"/>
+          <p:cNvSpPr/>
+          <p:nvPr/>
+        </p:nvSpPr>
+        <p:spPr>
+          <a:xfrm>
+            <a:off x="896112" y="1682496"/>
+            <a:ext cx="4773168" cy="292608"/>
+          </a:xfrm>
+          <a:prstGeom prst="rect">
+            <a:avLst/>
+          </a:prstGeom>
+          <a:noFill/>
+          <a:ln/>
+        </p:spPr>
+        <p:txBody>
+          <a:bodyPr wrap="square" rtlCol="0" anchor="ctr"/>
+          <a:lstStyle/>
+          <a:p>
+            <a:pPr indent="0" marL="0">
+              <a:buNone/>
+            </a:pPr>
+            <a:r>
+              <a:rPr lang="en-US" sz="1450" b="1" dirty="0">
+                <a:solidFill>
+                  <a:srgbClr val="1A1A2E"/>
+                </a:solidFill>
+                <a:latin typeface="Segoe UI" pitchFamily="34" charset="0"/>
+                <a:ea typeface="Segoe UI" pitchFamily="34" charset="-122"/>
+                <a:cs typeface="Segoe UI" pitchFamily="34" charset="-120"/>
+              </a:rPr>
+              <a:t>Project &amp; Contractor</a:t>
+            </a:r>
+            <a:endParaRPr lang="en-US" sz="1450" dirty="0"/>
+          </a:p>
+        </p:txBody>
+      </p:sp>
+      <p:sp>
+        <p:nvSpPr>
+          <p:cNvPr id="8" name="Text 6"/>
+          <p:cNvSpPr/>
+          <p:nvPr/>
+        </p:nvSpPr>
+        <p:spPr>
+          <a:xfrm>
+            <a:off x="896112" y="1975104"/>
+            <a:ext cx="4773168" cy="566928"/>
+          </a:xfrm>
+          <a:prstGeom prst="rect">
+            <a:avLst/>
+          </a:prstGeom>
+          <a:noFill/>
+          <a:ln/>
+        </p:spPr>
+        <p:txBody>
+          <a:bodyPr wrap="square" rtlCol="0" anchor="ctr"/>
+          <a:lstStyle/>
+          <a:p>
+            <a:pPr indent="0" marL="0">
+              <a:lnSpc>
+                <a:spcPct val="115000"/>
+              </a:lnSpc>
+              <a:buNone/>
+            </a:pPr>
+            <a:r>
+              <a:rPr lang="en-US" sz="1150" dirty="0">
+                <a:solidFill>
+                  <a:srgbClr val="475569"/>
+                </a:solidFill>
+                <a:latin typeface="Segoe UI" pitchFamily="34" charset="0"/>
+                <a:ea typeface="Segoe UI" pitchFamily="34" charset="-122"/>
+                <a:cs typeface="Segoe UI" pitchFamily="34" charset="-120"/>
+              </a:rPr>
+              <a:t>Searchable dropdowns pull from the same live Projects and Contractors lists used across the app.</a:t>
+            </a:r>
+            <a:endParaRPr lang="en-US" sz="1150" dirty="0"/>
+          </a:p>
+        </p:txBody>
+      </p:sp>
+      <p:sp>
+        <p:nvSpPr>
+          <p:cNvPr id="9" name="Shape 7"/>
+          <p:cNvSpPr/>
+          <p:nvPr/>
+        </p:nvSpPr>
+        <p:spPr>
+          <a:xfrm>
+            <a:off x="640080" y="2752344"/>
+            <a:ext cx="82296" cy="82296"/>
+          </a:xfrm>
+          <a:prstGeom prst="rect">
+            <a:avLst/>
+          </a:prstGeom>
+          <a:solidFill>
+            <a:srgbClr val="4F46E5"/>
+          </a:solidFill>
+          <a:ln/>
+        </p:spPr>
+      </p:sp>
+      <p:sp>
+        <p:nvSpPr>
+          <p:cNvPr id="10" name="Text 8"/>
+          <p:cNvSpPr/>
+          <p:nvPr/>
+        </p:nvSpPr>
+        <p:spPr>
+          <a:xfrm>
+            <a:off x="896112" y="2615184"/>
+            <a:ext cx="4773168" cy="292608"/>
+          </a:xfrm>
+          <a:prstGeom prst="rect">
+            <a:avLst/>
+          </a:prstGeom>
+          <a:noFill/>
+          <a:ln/>
+        </p:spPr>
+        <p:txBody>
+          <a:bodyPr wrap="square" rtlCol="0" anchor="ctr"/>
+          <a:lstStyle/>
+          <a:p>
+            <a:pPr indent="0" marL="0">
+              <a:buNone/>
+            </a:pPr>
+            <a:r>
+              <a:rPr lang="en-US" sz="1450" b="1" dirty="0">
+                <a:solidFill>
+                  <a:srgbClr val="1A1A2E"/>
+                </a:solidFill>
+                <a:latin typeface="Segoe UI" pitchFamily="34" charset="0"/>
+                <a:ea typeface="Segoe UI" pitchFamily="34" charset="-122"/>
+                <a:cs typeface="Segoe UI" pitchFamily="34" charset="-120"/>
+              </a:rPr>
+              <a:t>DRI Name is a dropdown here</a:t>
+            </a:r>
+            <a:endParaRPr lang="en-US" sz="1450" dirty="0"/>
+          </a:p>
+        </p:txBody>
+      </p:sp>
+      <p:sp>
+        <p:nvSpPr>
+          <p:cNvPr id="11" name="Text 9"/>
+          <p:cNvSpPr/>
+          <p:nvPr/>
+        </p:nvSpPr>
+        <p:spPr>
+          <a:xfrm>
+            <a:off x="896112" y="2907792"/>
+            <a:ext cx="4773168" cy="566928"/>
+          </a:xfrm>
+          <a:prstGeom prst="rect">
+            <a:avLst/>
+          </a:prstGeom>
+          <a:noFill/>
+          <a:ln/>
+        </p:spPr>
+        <p:txBody>
+          <a:bodyPr wrap="square" rtlCol="0" anchor="ctr"/>
+          <a:lstStyle/>
+          <a:p>
+            <a:pPr indent="0" marL="0">
+              <a:lnSpc>
+                <a:spcPct val="115000"/>
+              </a:lnSpc>
+              <a:buNone/>
+            </a:pPr>
+            <a:r>
+              <a:rPr lang="en-US" sz="1150" dirty="0">
+                <a:solidFill>
+                  <a:srgbClr val="475569"/>
+                </a:solidFill>
+                <a:latin typeface="Segoe UI" pitchFamily="34" charset="0"/>
+                <a:ea typeface="Segoe UI" pitchFamily="34" charset="-122"/>
+                <a:cs typeface="Segoe UI" pitchFamily="34" charset="-120"/>
+              </a:rPr>
+              <a:t>Inside the app it's picked from registered site DRIs — the public form uses a free-text field instead.</a:t>
+            </a:r>
+            <a:endParaRPr lang="en-US" sz="1150" dirty="0"/>
+          </a:p>
+        </p:txBody>
+      </p:sp>
+      <p:sp>
+        <p:nvSpPr>
+          <p:cNvPr id="12" name="Shape 10"/>
+          <p:cNvSpPr/>
+          <p:nvPr/>
+        </p:nvSpPr>
+        <p:spPr>
+          <a:xfrm>
+            <a:off x="640080" y="3685032"/>
+            <a:ext cx="82296" cy="82296"/>
+          </a:xfrm>
+          <a:prstGeom prst="rect">
+            <a:avLst/>
+          </a:prstGeom>
+          <a:solidFill>
+            <a:srgbClr val="4F46E5"/>
+          </a:solidFill>
+          <a:ln/>
+        </p:spPr>
+      </p:sp>
+      <p:sp>
+        <p:nvSpPr>
+          <p:cNvPr id="13" name="Text 11"/>
+          <p:cNvSpPr/>
+          <p:nvPr/>
+        </p:nvSpPr>
+        <p:spPr>
+          <a:xfrm>
+            <a:off x="896112" y="3547872"/>
+            <a:ext cx="4773168" cy="292608"/>
+          </a:xfrm>
+          <a:prstGeom prst="rect">
+            <a:avLst/>
+          </a:prstGeom>
+          <a:noFill/>
+          <a:ln/>
+        </p:spPr>
+        <p:txBody>
+          <a:bodyPr wrap="square" rtlCol="0" anchor="ctr"/>
+          <a:lstStyle/>
+          <a:p>
+            <a:pPr indent="0" marL="0">
+              <a:buNone/>
+            </a:pPr>
+            <a:r>
+              <a:rPr lang="en-US" sz="1450" b="1" dirty="0">
+                <a:solidFill>
+                  <a:srgbClr val="1A1A2E"/>
+                </a:solidFill>
+                <a:latin typeface="Segoe UI" pitchFamily="34" charset="0"/>
+                <a:ea typeface="Segoe UI" pitchFamily="34" charset="-122"/>
+                <a:cs typeface="Segoe UI" pitchFamily="34" charset="-120"/>
+              </a:rPr>
+              <a:t>Shift &amp; labour count</a:t>
+            </a:r>
+            <a:endParaRPr lang="en-US" sz="1450" dirty="0"/>
+          </a:p>
+        </p:txBody>
+      </p:sp>
+      <p:sp>
+        <p:nvSpPr>
+          <p:cNvPr id="14" name="Text 12"/>
+          <p:cNvSpPr/>
+          <p:nvPr/>
+        </p:nvSpPr>
+        <p:spPr>
+          <a:xfrm>
+            <a:off x="896112" y="3840480"/>
+            <a:ext cx="4773168" cy="566928"/>
+          </a:xfrm>
+          <a:prstGeom prst="rect">
+            <a:avLst/>
+          </a:prstGeom>
+          <a:noFill/>
+          <a:ln/>
+        </p:spPr>
+        <p:txBody>
+          <a:bodyPr wrap="square" rtlCol="0" anchor="ctr"/>
+          <a:lstStyle/>
+          <a:p>
+            <a:pPr indent="0" marL="0">
+              <a:lnSpc>
+                <a:spcPct val="115000"/>
+              </a:lnSpc>
+              <a:buNone/>
+            </a:pPr>
+            <a:r>
+              <a:rPr lang="en-US" sz="1150" dirty="0">
+                <a:solidFill>
+                  <a:srgbClr val="475569"/>
+                </a:solidFill>
+                <a:latin typeface="Segoe UI" pitchFamily="34" charset="0"/>
+                <a:ea typeface="Segoe UI" pitchFamily="34" charset="-122"/>
+                <a:cs typeface="Segoe UI" pitchFamily="34" charset="-120"/>
+              </a:rPr>
+              <a:t>Day or Night shift, plus how many labourers were on site — quick to fill, nothing optional missed.</a:t>
+            </a:r>
+            <a:endParaRPr lang="en-US" sz="1150" dirty="0"/>
+          </a:p>
+        </p:txBody>
+      </p:sp>
+      <p:sp>
+        <p:nvSpPr>
+          <p:cNvPr id="15" name="Shape 13"/>
+          <p:cNvSpPr/>
+          <p:nvPr/>
+        </p:nvSpPr>
+        <p:spPr>
+          <a:xfrm>
+            <a:off x="640080" y="4617720"/>
+            <a:ext cx="82296" cy="82296"/>
+          </a:xfrm>
+          <a:prstGeom prst="rect">
+            <a:avLst/>
+          </a:prstGeom>
+          <a:solidFill>
+            <a:srgbClr val="4F46E5"/>
+          </a:solidFill>
+          <a:ln/>
+        </p:spPr>
+      </p:sp>
+      <p:sp>
+        <p:nvSpPr>
+          <p:cNvPr id="16" name="Text 14"/>
+          <p:cNvSpPr/>
+          <p:nvPr/>
+        </p:nvSpPr>
+        <p:spPr>
+          <a:xfrm>
+            <a:off x="896112" y="4480560"/>
+            <a:ext cx="4773168" cy="292608"/>
+          </a:xfrm>
+          <a:prstGeom prst="rect">
+            <a:avLst/>
+          </a:prstGeom>
+          <a:noFill/>
+          <a:ln/>
+        </p:spPr>
+        <p:txBody>
+          <a:bodyPr wrap="square" rtlCol="0" anchor="ctr"/>
+          <a:lstStyle/>
+          <a:p>
+            <a:pPr indent="0" marL="0">
+              <a:buNone/>
+            </a:pPr>
+            <a:r>
+              <a:rPr lang="en-US" sz="1450" b="1" dirty="0">
+                <a:solidFill>
+                  <a:srgbClr val="1A1A2E"/>
+                </a:solidFill>
+                <a:latin typeface="Segoe UI" pitchFamily="34" charset="0"/>
+                <a:ea typeface="Segoe UI" pitchFamily="34" charset="-122"/>
+                <a:cs typeface="Segoe UI" pitchFamily="34" charset="-120"/>
+              </a:rPr>
+              <a:t>Date defaults to today</a:t>
+            </a:r>
+            <a:endParaRPr lang="en-US" sz="1450" dirty="0"/>
+          </a:p>
+        </p:txBody>
+      </p:sp>
+      <p:sp>
+        <p:nvSpPr>
+          <p:cNvPr id="17" name="Text 15"/>
+          <p:cNvSpPr/>
+          <p:nvPr/>
+        </p:nvSpPr>
+        <p:spPr>
+          <a:xfrm>
+            <a:off x="896112" y="4773168"/>
+            <a:ext cx="4773168" cy="566928"/>
+          </a:xfrm>
+          <a:prstGeom prst="rect">
+            <a:avLst/>
+          </a:prstGeom>
+          <a:noFill/>
+          <a:ln/>
+        </p:spPr>
+        <p:txBody>
+          <a:bodyPr wrap="square" rtlCol="0" anchor="ctr"/>
+          <a:lstStyle/>
+          <a:p>
+            <a:pPr indent="0" marL="0">
+              <a:lnSpc>
+                <a:spcPct val="115000"/>
+              </a:lnSpc>
+              <a:buNone/>
+            </a:pPr>
+            <a:r>
+              <a:rPr lang="en-US" sz="1150" dirty="0">
+                <a:solidFill>
+                  <a:srgbClr val="475569"/>
+                </a:solidFill>
+                <a:latin typeface="Segoe UI" pitchFamily="34" charset="0"/>
+                <a:ea typeface="Segoe UI" pitchFamily="34" charset="-122"/>
+                <a:cs typeface="Segoe UI" pitchFamily="34" charset="-120"/>
+              </a:rPr>
+              <a:t>Can't be set in the future, keeping every report tied to a real site day.</a:t>
+            </a:r>
+            <a:endParaRPr lang="en-US" sz="1150" dirty="0"/>
+          </a:p>
+        </p:txBody>
+      </p:sp>
+      <p:pic>
+        <p:nvPicPr>
+          <p:cNvPr id="18" name="Image 0" descr="shots/06_dpr_form_filled_meta.png">    </p:cNvPr>
+          <p:cNvPicPr>
+            <a:picLocks noChangeAspect="1"/>
+          </p:cNvPicPr>
+          <p:nvPr/>
+        </p:nvPicPr>
+        <p:blipFill>
+          <a:blip r:embed="rId1"/>
+          <a:stretch>
+            <a:fillRect/>
+          </a:stretch>
+        </p:blipFill>
+        <p:spPr>
+          <a:xfrm>
+            <a:off x="5989320" y="1600200"/>
+            <a:ext cx="5669280" cy="4663440"/>
+          </a:xfrm>
+          <a:prstGeom prst="rect">
+            <a:avLst/>
+          </a:prstGeom>
+          <a:effectLst>
+            <a:outerShdw sx="100000" sy="100000" kx="0" ky="0" algn="bl" rotWithShape="0" blurRad="228600" dist="76200" dir="5400000">
+              <a:srgbClr val="1A1A2E">
+                <a:alpha val="35000"/>
+              </a:srgbClr>
+            </a:outerShdw>
+          </a:effectLst>
+        </p:spPr>
+      </p:pic>
+      <p:sp>
+        <p:nvSpPr>
+          <p:cNvPr id="19" name="Text 16"/>
+          <p:cNvSpPr/>
+          <p:nvPr/>
+        </p:nvSpPr>
+        <p:spPr>
+          <a:xfrm>
+            <a:off x="457200" y="6547104"/>
+            <a:ext cx="5486400" cy="274320"/>
+          </a:xfrm>
+          <a:prstGeom prst="rect">
+            <a:avLst/>
+          </a:prstGeom>
+          <a:noFill/>
+          <a:ln/>
+        </p:spPr>
+        <p:txBody>
+          <a:bodyPr wrap="square" rtlCol="0" anchor="ctr"/>
+          <a:lstStyle/>
+          <a:p>
+            <a:pPr indent="0" marL="0">
+              <a:buNone/>
+            </a:pPr>
+            <a:r>
+              <a:rPr lang="en-US" sz="900" dirty="0">
+                <a:solidFill>
+                  <a:srgbClr val="94A3B8"/>
+                </a:solidFill>
+                <a:latin typeface="Segoe UI" pitchFamily="34" charset="0"/>
+                <a:ea typeface="Segoe UI" pitchFamily="34" charset="-122"/>
+                <a:cs typeface="Segoe UI" pitchFamily="34" charset="-120"/>
+              </a:rPr>
+              <a:t>Nexora ERP  ·  DRI Dashboard Overview</a:t>
+            </a:r>
+            <a:endParaRPr lang="en-US" sz="900" dirty="0"/>
+          </a:p>
+        </p:txBody>
+      </p:sp>
+      <p:sp>
+        <p:nvSpPr>
+          <p:cNvPr id="20" name="Text 17"/>
+          <p:cNvSpPr/>
+          <p:nvPr/>
+        </p:nvSpPr>
+        <p:spPr>
+          <a:xfrm>
+            <a:off x="11521440" y="6547104"/>
+            <a:ext cx="365760" cy="274320"/>
+          </a:xfrm>
+          <a:prstGeom prst="rect">
+            <a:avLst/>
+          </a:prstGeom>
+          <a:noFill/>
+          <a:ln/>
+        </p:spPr>
+        <p:txBody>
+          <a:bodyPr wrap="square" rtlCol="0" anchor="ctr"/>
+          <a:lstStyle/>
+          <a:p>
+            <a:pPr algn="r" indent="0" marL="0">
+              <a:buNone/>
+            </a:pPr>
+            <a:r>
+              <a:rPr lang="en-US" sz="900" dirty="0">
+                <a:solidFill>
+                  <a:srgbClr val="94A3B8"/>
+                </a:solidFill>
+                <a:latin typeface="Segoe UI" pitchFamily="34" charset="0"/>
+                <a:ea typeface="Segoe UI" pitchFamily="34" charset="-122"/>
+                <a:cs typeface="Segoe UI" pitchFamily="34" charset="-120"/>
+              </a:rPr>
+              <a:t>4</a:t>
+            </a:r>
+            <a:endParaRPr lang="en-US" sz="900" dirty="0"/>
           </a:p>
         </p:txBody>
       </p:sp>
@@ -6601,7 +5840,7 @@
                 <a:ea typeface="Segoe UI" pitchFamily="34" charset="-122"/>
                 <a:cs typeface="Segoe UI" pitchFamily="34" charset="-120"/>
               </a:rPr>
-              <a:t>Daily Progress Report — Overview</a:t>
+              <a:t>Work-Type Checklist + Photo Evidence</a:t>
             </a:r>
             <a:endParaRPr lang="en-US" sz="2400" dirty="0"/>
           </a:p>
@@ -6642,7 +5881,7 @@
                 <a:ea typeface="Segoe UI" pitchFamily="34" charset="-122"/>
                 <a:cs typeface="Segoe UI" pitchFamily="34" charset="-120"/>
               </a:rPr>
-              <a:t>Replaces two separate paper-style reports with a single, photo-verified daily submission.</a:t>
+              <a:t>32 real construction categories — check what happened today, then prove it with photos.</a:t>
             </a:r>
             <a:endParaRPr lang="en-US" sz="1250" dirty="0"/>
           </a:p>
@@ -6701,7 +5940,7 @@
                 <a:ea typeface="Segoe UI" pitchFamily="34" charset="-122"/>
                 <a:cs typeface="Segoe UI" pitchFamily="34" charset="-120"/>
               </a:rPr>
-              <a:t>One submission per site day</a:t>
+              <a:t>Check every category that applied</a:t>
             </a:r>
             <a:endParaRPr lang="en-US" sz="1450" dirty="0"/>
           </a:p>
@@ -6743,7 +5982,7 @@
                 <a:ea typeface="Segoe UI" pitchFamily="34" charset="-122"/>
                 <a:cs typeface="Segoe UI" pitchFamily="34" charset="-120"/>
               </a:rPr>
-              <a:t>Project, DRI name, date, contractor, shift, and today's labour count — all in one place.</a:t>
+              <a:t>Civil, Electrical, Plumbing, Waterproofing, and 28 more — a DRI checks exactly what work happened.</a:t>
             </a:r>
             <a:endParaRPr lang="en-US" sz="1150" dirty="0"/>
           </a:p>
@@ -6802,7 +6041,7 @@
                 <a:ea typeface="Segoe UI" pitchFamily="34" charset="-122"/>
                 <a:cs typeface="Segoe UI" pitchFamily="34" charset="-120"/>
               </a:rPr>
-              <a:t>Every report is listed</a:t>
+              <a:t>5-photo minimum per category</a:t>
             </a:r>
             <a:endParaRPr lang="en-US" sz="1450" dirty="0"/>
           </a:p>
@@ -6844,7 +6083,7 @@
                 <a:ea typeface="Segoe UI" pitchFamily="34" charset="-122"/>
                 <a:cs typeface="Segoe UI" pitchFamily="34" charset="-120"/>
               </a:rPr>
-              <a:t>The Recent Reports table shows what's been logged, by whom, and how many categories were covered.</a:t>
+              <a:t>Checking a box opens its own photo slot — at least 5 site photos are required before it counts as covered.</a:t>
             </a:r>
             <a:endParaRPr lang="en-US" sz="1150" dirty="0"/>
           </a:p>
@@ -6903,7 +6142,7 @@
                 <a:ea typeface="Segoe UI" pitchFamily="34" charset="-122"/>
                 <a:cs typeface="Segoe UI" pitchFamily="34" charset="-120"/>
               </a:rPr>
-              <a:t>Raise a Drawing Request inline</a:t>
+              <a:t>Photos are compressed automatically</a:t>
             </a:r>
             <a:endParaRPr lang="en-US" sz="1450" dirty="0"/>
           </a:p>
@@ -6945,7 +6184,7 @@
                 <a:ea typeface="Segoe UI" pitchFamily="34" charset="-122"/>
                 <a:cs typeface="Segoe UI" pitchFamily="34" charset="-120"/>
               </a:rPr>
-              <a:t>A DRI who hits a missing drawing while filling this out can raise it without leaving the page.</a:t>
+              <a:t>Images are resized and compressed client-side so a full day's evidence stays lightweight to submit.</a:t>
             </a:r>
             <a:endParaRPr lang="en-US" sz="1150" dirty="0"/>
           </a:p>
@@ -7004,7 +6243,7 @@
                 <a:ea typeface="Segoe UI" pitchFamily="34" charset="-122"/>
                 <a:cs typeface="Segoe UI" pitchFamily="34" charset="-120"/>
               </a:rPr>
-              <a:t>Available two ways</a:t>
+              <a:t>Nothing submits until it's complete</a:t>
             </a:r>
             <a:endParaRPr lang="en-US" sz="1450" dirty="0"/>
           </a:p>
@@ -7046,7 +6285,7 @@
                 <a:ea typeface="Segoe UI" pitchFamily="34" charset="-122"/>
                 <a:cs typeface="Segoe UI" pitchFamily="34" charset="-120"/>
               </a:rPr>
-              <a:t>Inside the app for logged-in DRIs/Admins, and as a public no-login form for anyone on site.</a:t>
+              <a:t>The Submit button validates every checked category has its minimum photos before it goes through.</a:t>
             </a:r>
             <a:endParaRPr lang="en-US" sz="1150" dirty="0"/>
           </a:p>
@@ -7054,7 +6293,7 @@
       </p:sp>
       <p:pic>
         <p:nvPicPr>
-          <p:cNvPr id="18" name="Image 0" descr="shots/09_dpr_submitted_list.png">    </p:cNvPr>
+          <p:cNvPr id="18" name="Image 0" descr="shots/08_dpr_photos_uploaded.png">    </p:cNvPr>
           <p:cNvPicPr>
             <a:picLocks noChangeAspect="1"/>
           </p:cNvPicPr>
@@ -7155,7 +6394,7 @@
                 <a:ea typeface="Segoe UI" pitchFamily="34" charset="-122"/>
                 <a:cs typeface="Segoe UI" pitchFamily="34" charset="-120"/>
               </a:rPr>
-              <a:t>6</a:t>
+              <a:t>5</a:t>
             </a:r>
             <a:endParaRPr lang="en-US" sz="900" dirty="0"/>
           </a:p>
@@ -7266,7 +6505,7 @@
                 <a:ea typeface="Segoe UI" pitchFamily="34" charset="-122"/>
                 <a:cs typeface="Segoe UI" pitchFamily="34" charset="-120"/>
               </a:rPr>
-              <a:t>Filling In a Report</a:t>
+              <a:t>Reviewing a Submitted Report</a:t>
             </a:r>
             <a:endParaRPr lang="en-US" sz="2400" dirty="0"/>
           </a:p>
@@ -7307,7 +6546,7 @@
                 <a:ea typeface="Segoe UI" pitchFamily="34" charset="-122"/>
                 <a:cs typeface="Segoe UI" pitchFamily="34" charset="-120"/>
               </a:rPr>
-              <a:t>Report Details up top, the work-type checklist below — both in one wide, well-spaced drawer.</a:t>
+              <a:t>Every category's photo evidence stays attached to the report, viewable any time.</a:t>
             </a:r>
             <a:endParaRPr lang="en-US" sz="1250" dirty="0"/>
           </a:p>
@@ -7366,7 +6605,7 @@
                 <a:ea typeface="Segoe UI" pitchFamily="34" charset="-122"/>
                 <a:cs typeface="Segoe UI" pitchFamily="34" charset="-120"/>
               </a:rPr>
-              <a:t>Project &amp; Contractor</a:t>
+              <a:t>Full report summary</a:t>
             </a:r>
             <a:endParaRPr lang="en-US" sz="1450" dirty="0"/>
           </a:p>
@@ -7408,7 +6647,7 @@
                 <a:ea typeface="Segoe UI" pitchFamily="34" charset="-122"/>
                 <a:cs typeface="Segoe UI" pitchFamily="34" charset="-120"/>
               </a:rPr>
-              <a:t>Searchable dropdowns pull from the same live Projects and Contractors lists used across the app.</a:t>
+              <a:t>Date, DRI, contractor, shift, and labour count are all shown together at the top.</a:t>
             </a:r>
             <a:endParaRPr lang="en-US" sz="1150" dirty="0"/>
           </a:p>
@@ -7467,7 +6706,7 @@
                 <a:ea typeface="Segoe UI" pitchFamily="34" charset="-122"/>
                 <a:cs typeface="Segoe UI" pitchFamily="34" charset="-120"/>
               </a:rPr>
-              <a:t>DRI Name is a dropdown here</a:t>
+              <a:t>Photo evidence, per category</a:t>
             </a:r>
             <a:endParaRPr lang="en-US" sz="1450" dirty="0"/>
           </a:p>
@@ -7509,7 +6748,7 @@
                 <a:ea typeface="Segoe UI" pitchFamily="34" charset="-122"/>
                 <a:cs typeface="Segoe UI" pitchFamily="34" charset="-120"/>
               </a:rPr>
-              <a:t>Inside the app it's picked from registered site DRIs — the public form uses a free-text field instead.</a:t>
+              <a:t>Each checked work type keeps its own gallery of site photos — click through to open full size.</a:t>
             </a:r>
             <a:endParaRPr lang="en-US" sz="1150" dirty="0"/>
           </a:p>
@@ -7568,7 +6807,7 @@
                 <a:ea typeface="Segoe UI" pitchFamily="34" charset="-122"/>
                 <a:cs typeface="Segoe UI" pitchFamily="34" charset="-120"/>
               </a:rPr>
-              <a:t>Shift &amp; labour count</a:t>
+              <a:t>A permanent, auditable record</a:t>
             </a:r>
             <a:endParaRPr lang="en-US" sz="1450" dirty="0"/>
           </a:p>
@@ -7610,108 +6849,7 @@
                 <a:ea typeface="Segoe UI" pitchFamily="34" charset="-122"/>
                 <a:cs typeface="Segoe UI" pitchFamily="34" charset="-120"/>
               </a:rPr>
-              <a:t>Day or Night shift, plus how many labourers were on site — quick to fill, nothing optional missed.</a:t>
-            </a:r>
-            <a:endParaRPr lang="en-US" sz="1150" dirty="0"/>
-          </a:p>
-        </p:txBody>
-      </p:sp>
-      <p:sp>
-        <p:nvSpPr>
-          <p:cNvPr id="15" name="Shape 13"/>
-          <p:cNvSpPr/>
-          <p:nvPr/>
-        </p:nvSpPr>
-        <p:spPr>
-          <a:xfrm>
-            <a:off x="640080" y="4617720"/>
-            <a:ext cx="82296" cy="82296"/>
-          </a:xfrm>
-          <a:prstGeom prst="rect">
-            <a:avLst/>
-          </a:prstGeom>
-          <a:solidFill>
-            <a:srgbClr val="4F46E5"/>
-          </a:solidFill>
-          <a:ln/>
-        </p:spPr>
-      </p:sp>
-      <p:sp>
-        <p:nvSpPr>
-          <p:cNvPr id="16" name="Text 14"/>
-          <p:cNvSpPr/>
-          <p:nvPr/>
-        </p:nvSpPr>
-        <p:spPr>
-          <a:xfrm>
-            <a:off x="896112" y="4480560"/>
-            <a:ext cx="4773168" cy="292608"/>
-          </a:xfrm>
-          <a:prstGeom prst="rect">
-            <a:avLst/>
-          </a:prstGeom>
-          <a:noFill/>
-          <a:ln/>
-        </p:spPr>
-        <p:txBody>
-          <a:bodyPr wrap="square" rtlCol="0" anchor="ctr"/>
-          <a:lstStyle/>
-          <a:p>
-            <a:pPr indent="0" marL="0">
-              <a:buNone/>
-            </a:pPr>
-            <a:r>
-              <a:rPr lang="en-US" sz="1450" b="1" dirty="0">
-                <a:solidFill>
-                  <a:srgbClr val="1A1A2E"/>
-                </a:solidFill>
-                <a:latin typeface="Segoe UI" pitchFamily="34" charset="0"/>
-                <a:ea typeface="Segoe UI" pitchFamily="34" charset="-122"/>
-                <a:cs typeface="Segoe UI" pitchFamily="34" charset="-120"/>
-              </a:rPr>
-              <a:t>Date defaults to today</a:t>
-            </a:r>
-            <a:endParaRPr lang="en-US" sz="1450" dirty="0"/>
-          </a:p>
-        </p:txBody>
-      </p:sp>
-      <p:sp>
-        <p:nvSpPr>
-          <p:cNvPr id="17" name="Text 15"/>
-          <p:cNvSpPr/>
-          <p:nvPr/>
-        </p:nvSpPr>
-        <p:spPr>
-          <a:xfrm>
-            <a:off x="896112" y="4773168"/>
-            <a:ext cx="4773168" cy="566928"/>
-          </a:xfrm>
-          <a:prstGeom prst="rect">
-            <a:avLst/>
-          </a:prstGeom>
-          <a:noFill/>
-          <a:ln/>
-        </p:spPr>
-        <p:txBody>
-          <a:bodyPr wrap="square" rtlCol="0" anchor="ctr"/>
-          <a:lstStyle/>
-          <a:p>
-            <a:pPr indent="0" marL="0">
-              <a:lnSpc>
-                <a:spcPct val="115000"/>
-              </a:lnSpc>
-              <a:buNone/>
-            </a:pPr>
-            <a:r>
-              <a:rPr lang="en-US" sz="1150" dirty="0">
-                <a:solidFill>
-                  <a:srgbClr val="475569"/>
-                </a:solidFill>
-                <a:latin typeface="Segoe UI" pitchFamily="34" charset="0"/>
-                <a:ea typeface="Segoe UI" pitchFamily="34" charset="-122"/>
-                <a:cs typeface="Segoe UI" pitchFamily="34" charset="-120"/>
-              </a:rPr>
-              <a:t>Can't be set in the future, keeping every report tied to a real site day.</a:t>
+              <a:t>Once submitted, the report and its photos become part of that project's history.</a:t>
             </a:r>
             <a:endParaRPr lang="en-US" sz="1150" dirty="0"/>
           </a:p>
@@ -7719,7 +6857,7 @@
       </p:sp>
       <p:pic>
         <p:nvPicPr>
-          <p:cNvPr id="18" name="Image 0" descr="shots/06_dpr_form_filled_meta.png">    </p:cNvPr>
+          <p:cNvPr id="15" name="Image 0" descr="shots/10_dpr_view_detail.png">    </p:cNvPr>
           <p:cNvPicPr>
             <a:picLocks noChangeAspect="1"/>
           </p:cNvPicPr>
@@ -7750,7 +6888,7 @@
       </p:pic>
       <p:sp>
         <p:nvSpPr>
-          <p:cNvPr id="19" name="Text 16"/>
+          <p:cNvPr id="16" name="Text 13"/>
           <p:cNvSpPr/>
           <p:nvPr/>
         </p:nvSpPr>
@@ -7789,7 +6927,7 @@
       </p:sp>
       <p:sp>
         <p:nvSpPr>
-          <p:cNvPr id="20" name="Text 17"/>
+          <p:cNvPr id="17" name="Text 14"/>
           <p:cNvSpPr/>
           <p:nvPr/>
         </p:nvSpPr>
@@ -7820,7 +6958,7 @@
                 <a:ea typeface="Segoe UI" pitchFamily="34" charset="-122"/>
                 <a:cs typeface="Segoe UI" pitchFamily="34" charset="-120"/>
               </a:rPr>
-              <a:t>7</a:t>
+              <a:t>6</a:t>
             </a:r>
             <a:endParaRPr lang="en-US" sz="900" dirty="0"/>
           </a:p>
@@ -7840,7 +6978,7 @@
     <p:bg>
       <p:bgPr>
         <a:solidFill>
-          <a:srgbClr val="FFFFFF"/>
+          <a:srgbClr val="7C3AED"/>
         </a:solidFill>
       </p:bgPr>
     </p:bg>
@@ -7860,23 +6998,44 @@
       </p:grpSpPr>
       <p:sp>
         <p:nvSpPr>
-          <p:cNvPr id="2" name="Shape 0"/>
-          <p:cNvSpPr/>
-          <p:nvPr/>
-        </p:nvSpPr>
-        <p:spPr>
-          <a:xfrm>
-            <a:off x="0" y="0"/>
-            <a:ext cx="12191695" cy="1234440"/>
-          </a:xfrm>
-          <a:prstGeom prst="rect">
-            <a:avLst/>
-          </a:prstGeom>
-          <a:solidFill>
-            <a:srgbClr val="4F46E5"/>
-          </a:solidFill>
-          <a:ln/>
-        </p:spPr>
+          <p:cNvPr id="2" name="Text 0"/>
+          <p:cNvSpPr/>
+          <p:nvPr/>
+        </p:nvSpPr>
+        <p:spPr>
+          <a:xfrm>
+            <a:off x="822960" y="2011680"/>
+            <a:ext cx="2743200" cy="1463040"/>
+          </a:xfrm>
+          <a:prstGeom prst="rect">
+            <a:avLst/>
+          </a:prstGeom>
+          <a:noFill/>
+          <a:ln/>
+        </p:spPr>
+        <p:txBody>
+          <a:bodyPr wrap="square" rtlCol="0" anchor="ctr"/>
+          <a:lstStyle/>
+          <a:p>
+            <a:pPr indent="0" marL="0">
+              <a:buNone/>
+            </a:pPr>
+            <a:r>
+              <a:rPr lang="en-US" sz="9000" b="1" dirty="0">
+                <a:solidFill>
+                  <a:srgbClr val="FFFFFF">
+                    <a:alpha val="30000"/>
+                  </a:srgbClr>
+                </a:solidFill>
+                <a:latin typeface="Segoe UI" pitchFamily="34" charset="0"/>
+                <a:ea typeface="Segoe UI" pitchFamily="34" charset="-122"/>
+                <a:cs typeface="Segoe UI" pitchFamily="34" charset="-120"/>
+              </a:rPr>
+              <a:t>02</a:t>
+            </a:r>
+            <a:endParaRPr lang="en-US" sz="9000" dirty="0"/>
+          </a:p>
+        </p:txBody>
       </p:sp>
       <p:sp>
         <p:nvSpPr>
@@ -7886,8 +7045,8 @@
         </p:nvSpPr>
         <p:spPr>
           <a:xfrm>
-            <a:off x="502920" y="310896"/>
-            <a:ext cx="82296" cy="621792"/>
+            <a:off x="868680" y="3429000"/>
+            <a:ext cx="1280160" cy="64008"/>
           </a:xfrm>
           <a:prstGeom prst="rect">
             <a:avLst/>
@@ -7906,24 +7065,24 @@
         </p:nvSpPr>
         <p:spPr>
           <a:xfrm>
-            <a:off x="777240" y="237744"/>
-            <a:ext cx="9601200" cy="502920"/>
-          </a:xfrm>
-          <a:prstGeom prst="rect">
-            <a:avLst/>
-          </a:prstGeom>
-          <a:noFill/>
-          <a:ln/>
-        </p:spPr>
-        <p:txBody>
-          <a:bodyPr wrap="square" rtlCol="0" anchor="ctr"/>
-          <a:lstStyle/>
-          <a:p>
-            <a:pPr indent="0" marL="0">
-              <a:buNone/>
-            </a:pPr>
-            <a:r>
-              <a:rPr lang="en-US" sz="2400" b="1" dirty="0">
+            <a:off x="822960" y="3611880"/>
+            <a:ext cx="10058400" cy="914400"/>
+          </a:xfrm>
+          <a:prstGeom prst="rect">
+            <a:avLst/>
+          </a:prstGeom>
+          <a:noFill/>
+          <a:ln/>
+        </p:spPr>
+        <p:txBody>
+          <a:bodyPr wrap="square" rtlCol="0" anchor="ctr"/>
+          <a:lstStyle/>
+          <a:p>
+            <a:pPr indent="0" marL="0">
+              <a:buNone/>
+            </a:pPr>
+            <a:r>
+              <a:rPr lang="en-US" sz="4000" b="1" dirty="0">
                 <a:solidFill>
                   <a:srgbClr val="FFFFFF"/>
                 </a:solidFill>
@@ -7931,9 +7090,9 @@
                 <a:ea typeface="Segoe UI" pitchFamily="34" charset="-122"/>
                 <a:cs typeface="Segoe UI" pitchFamily="34" charset="-120"/>
               </a:rPr>
-              <a:t>Work-Type Checklist + Photo Evidence</a:t>
-            </a:r>
-            <a:endParaRPr lang="en-US" sz="2400" dirty="0"/>
+              <a:t>Drawing Requests</a:t>
+            </a:r>
+            <a:endParaRPr lang="en-US" sz="4000" dirty="0"/>
           </a:p>
         </p:txBody>
       </p:sp>
@@ -7945,24 +7104,24 @@
         </p:nvSpPr>
         <p:spPr>
           <a:xfrm>
-            <a:off x="777240" y="713232"/>
-            <a:ext cx="10515600" cy="365760"/>
-          </a:xfrm>
-          <a:prstGeom prst="rect">
-            <a:avLst/>
-          </a:prstGeom>
-          <a:noFill/>
-          <a:ln/>
-        </p:spPr>
-        <p:txBody>
-          <a:bodyPr wrap="square" rtlCol="0" anchor="ctr"/>
-          <a:lstStyle/>
-          <a:p>
-            <a:pPr indent="0" marL="0">
-              <a:buNone/>
-            </a:pPr>
-            <a:r>
-              <a:rPr lang="en-US" sz="1250" dirty="0">
+            <a:off x="822960" y="4434840"/>
+            <a:ext cx="9144000" cy="548640"/>
+          </a:xfrm>
+          <a:prstGeom prst="rect">
+            <a:avLst/>
+          </a:prstGeom>
+          <a:noFill/>
+          <a:ln/>
+        </p:spPr>
+        <p:txBody>
+          <a:bodyPr wrap="square" rtlCol="0" anchor="ctr"/>
+          <a:lstStyle/>
+          <a:p>
+            <a:pPr indent="0" marL="0">
+              <a:buNone/>
+            </a:pPr>
+            <a:r>
+              <a:rPr lang="en-US" sz="1500" dirty="0">
                 <a:solidFill>
                   <a:srgbClr val="FFFFFF">
                     <a:alpha val="85000"/>
@@ -7972,522 +7131,9 @@
                 <a:ea typeface="Segoe UI" pitchFamily="34" charset="-122"/>
                 <a:cs typeface="Segoe UI" pitchFamily="34" charset="-120"/>
               </a:rPr>
-              <a:t>32 real construction categories — check what happened today, then prove it with photos.</a:t>
-            </a:r>
-            <a:endParaRPr lang="en-US" sz="1250" dirty="0"/>
-          </a:p>
-        </p:txBody>
-      </p:sp>
-      <p:sp>
-        <p:nvSpPr>
-          <p:cNvPr id="6" name="Shape 4"/>
-          <p:cNvSpPr/>
-          <p:nvPr/>
-        </p:nvSpPr>
-        <p:spPr>
-          <a:xfrm>
-            <a:off x="640080" y="1819656"/>
-            <a:ext cx="82296" cy="82296"/>
-          </a:xfrm>
-          <a:prstGeom prst="rect">
-            <a:avLst/>
-          </a:prstGeom>
-          <a:solidFill>
-            <a:srgbClr val="4F46E5"/>
-          </a:solidFill>
-          <a:ln/>
-        </p:spPr>
-      </p:sp>
-      <p:sp>
-        <p:nvSpPr>
-          <p:cNvPr id="7" name="Text 5"/>
-          <p:cNvSpPr/>
-          <p:nvPr/>
-        </p:nvSpPr>
-        <p:spPr>
-          <a:xfrm>
-            <a:off x="896112" y="1682496"/>
-            <a:ext cx="4773168" cy="292608"/>
-          </a:xfrm>
-          <a:prstGeom prst="rect">
-            <a:avLst/>
-          </a:prstGeom>
-          <a:noFill/>
-          <a:ln/>
-        </p:spPr>
-        <p:txBody>
-          <a:bodyPr wrap="square" rtlCol="0" anchor="ctr"/>
-          <a:lstStyle/>
-          <a:p>
-            <a:pPr indent="0" marL="0">
-              <a:buNone/>
-            </a:pPr>
-            <a:r>
-              <a:rPr lang="en-US" sz="1450" b="1" dirty="0">
-                <a:solidFill>
-                  <a:srgbClr val="1A1A2E"/>
-                </a:solidFill>
-                <a:latin typeface="Segoe UI" pitchFamily="34" charset="0"/>
-                <a:ea typeface="Segoe UI" pitchFamily="34" charset="-122"/>
-                <a:cs typeface="Segoe UI" pitchFamily="34" charset="-120"/>
-              </a:rPr>
-              <a:t>Check every category that applied</a:t>
-            </a:r>
-            <a:endParaRPr lang="en-US" sz="1450" dirty="0"/>
-          </a:p>
-        </p:txBody>
-      </p:sp>
-      <p:sp>
-        <p:nvSpPr>
-          <p:cNvPr id="8" name="Text 6"/>
-          <p:cNvSpPr/>
-          <p:nvPr/>
-        </p:nvSpPr>
-        <p:spPr>
-          <a:xfrm>
-            <a:off x="896112" y="1975104"/>
-            <a:ext cx="4773168" cy="566928"/>
-          </a:xfrm>
-          <a:prstGeom prst="rect">
-            <a:avLst/>
-          </a:prstGeom>
-          <a:noFill/>
-          <a:ln/>
-        </p:spPr>
-        <p:txBody>
-          <a:bodyPr wrap="square" rtlCol="0" anchor="ctr"/>
-          <a:lstStyle/>
-          <a:p>
-            <a:pPr indent="0" marL="0">
-              <a:lnSpc>
-                <a:spcPct val="115000"/>
-              </a:lnSpc>
-              <a:buNone/>
-            </a:pPr>
-            <a:r>
-              <a:rPr lang="en-US" sz="1150" dirty="0">
-                <a:solidFill>
-                  <a:srgbClr val="475569"/>
-                </a:solidFill>
-                <a:latin typeface="Segoe UI" pitchFamily="34" charset="0"/>
-                <a:ea typeface="Segoe UI" pitchFamily="34" charset="-122"/>
-                <a:cs typeface="Segoe UI" pitchFamily="34" charset="-120"/>
-              </a:rPr>
-              <a:t>Civil, Electrical, Plumbing, Waterproofing, and 28 more — a DRI checks exactly what work happened.</a:t>
-            </a:r>
-            <a:endParaRPr lang="en-US" sz="1150" dirty="0"/>
-          </a:p>
-        </p:txBody>
-      </p:sp>
-      <p:sp>
-        <p:nvSpPr>
-          <p:cNvPr id="9" name="Shape 7"/>
-          <p:cNvSpPr/>
-          <p:nvPr/>
-        </p:nvSpPr>
-        <p:spPr>
-          <a:xfrm>
-            <a:off x="640080" y="2752344"/>
-            <a:ext cx="82296" cy="82296"/>
-          </a:xfrm>
-          <a:prstGeom prst="rect">
-            <a:avLst/>
-          </a:prstGeom>
-          <a:solidFill>
-            <a:srgbClr val="4F46E5"/>
-          </a:solidFill>
-          <a:ln/>
-        </p:spPr>
-      </p:sp>
-      <p:sp>
-        <p:nvSpPr>
-          <p:cNvPr id="10" name="Text 8"/>
-          <p:cNvSpPr/>
-          <p:nvPr/>
-        </p:nvSpPr>
-        <p:spPr>
-          <a:xfrm>
-            <a:off x="896112" y="2615184"/>
-            <a:ext cx="4773168" cy="292608"/>
-          </a:xfrm>
-          <a:prstGeom prst="rect">
-            <a:avLst/>
-          </a:prstGeom>
-          <a:noFill/>
-          <a:ln/>
-        </p:spPr>
-        <p:txBody>
-          <a:bodyPr wrap="square" rtlCol="0" anchor="ctr"/>
-          <a:lstStyle/>
-          <a:p>
-            <a:pPr indent="0" marL="0">
-              <a:buNone/>
-            </a:pPr>
-            <a:r>
-              <a:rPr lang="en-US" sz="1450" b="1" dirty="0">
-                <a:solidFill>
-                  <a:srgbClr val="1A1A2E"/>
-                </a:solidFill>
-                <a:latin typeface="Segoe UI" pitchFamily="34" charset="0"/>
-                <a:ea typeface="Segoe UI" pitchFamily="34" charset="-122"/>
-                <a:cs typeface="Segoe UI" pitchFamily="34" charset="-120"/>
-              </a:rPr>
-              <a:t>5-photo minimum per category</a:t>
-            </a:r>
-            <a:endParaRPr lang="en-US" sz="1450" dirty="0"/>
-          </a:p>
-        </p:txBody>
-      </p:sp>
-      <p:sp>
-        <p:nvSpPr>
-          <p:cNvPr id="11" name="Text 9"/>
-          <p:cNvSpPr/>
-          <p:nvPr/>
-        </p:nvSpPr>
-        <p:spPr>
-          <a:xfrm>
-            <a:off x="896112" y="2907792"/>
-            <a:ext cx="4773168" cy="566928"/>
-          </a:xfrm>
-          <a:prstGeom prst="rect">
-            <a:avLst/>
-          </a:prstGeom>
-          <a:noFill/>
-          <a:ln/>
-        </p:spPr>
-        <p:txBody>
-          <a:bodyPr wrap="square" rtlCol="0" anchor="ctr"/>
-          <a:lstStyle/>
-          <a:p>
-            <a:pPr indent="0" marL="0">
-              <a:lnSpc>
-                <a:spcPct val="115000"/>
-              </a:lnSpc>
-              <a:buNone/>
-            </a:pPr>
-            <a:r>
-              <a:rPr lang="en-US" sz="1150" dirty="0">
-                <a:solidFill>
-                  <a:srgbClr val="475569"/>
-                </a:solidFill>
-                <a:latin typeface="Segoe UI" pitchFamily="34" charset="0"/>
-                <a:ea typeface="Segoe UI" pitchFamily="34" charset="-122"/>
-                <a:cs typeface="Segoe UI" pitchFamily="34" charset="-120"/>
-              </a:rPr>
-              <a:t>Checking a box opens its own photo slot — at least 5 site photos are required before it counts as covered.</a:t>
-            </a:r>
-            <a:endParaRPr lang="en-US" sz="1150" dirty="0"/>
-          </a:p>
-        </p:txBody>
-      </p:sp>
-      <p:sp>
-        <p:nvSpPr>
-          <p:cNvPr id="12" name="Shape 10"/>
-          <p:cNvSpPr/>
-          <p:nvPr/>
-        </p:nvSpPr>
-        <p:spPr>
-          <a:xfrm>
-            <a:off x="640080" y="3685032"/>
-            <a:ext cx="82296" cy="82296"/>
-          </a:xfrm>
-          <a:prstGeom prst="rect">
-            <a:avLst/>
-          </a:prstGeom>
-          <a:solidFill>
-            <a:srgbClr val="4F46E5"/>
-          </a:solidFill>
-          <a:ln/>
-        </p:spPr>
-      </p:sp>
-      <p:sp>
-        <p:nvSpPr>
-          <p:cNvPr id="13" name="Text 11"/>
-          <p:cNvSpPr/>
-          <p:nvPr/>
-        </p:nvSpPr>
-        <p:spPr>
-          <a:xfrm>
-            <a:off x="896112" y="3547872"/>
-            <a:ext cx="4773168" cy="292608"/>
-          </a:xfrm>
-          <a:prstGeom prst="rect">
-            <a:avLst/>
-          </a:prstGeom>
-          <a:noFill/>
-          <a:ln/>
-        </p:spPr>
-        <p:txBody>
-          <a:bodyPr wrap="square" rtlCol="0" anchor="ctr"/>
-          <a:lstStyle/>
-          <a:p>
-            <a:pPr indent="0" marL="0">
-              <a:buNone/>
-            </a:pPr>
-            <a:r>
-              <a:rPr lang="en-US" sz="1450" b="1" dirty="0">
-                <a:solidFill>
-                  <a:srgbClr val="1A1A2E"/>
-                </a:solidFill>
-                <a:latin typeface="Segoe UI" pitchFamily="34" charset="0"/>
-                <a:ea typeface="Segoe UI" pitchFamily="34" charset="-122"/>
-                <a:cs typeface="Segoe UI" pitchFamily="34" charset="-120"/>
-              </a:rPr>
-              <a:t>Photos are compressed automatically</a:t>
-            </a:r>
-            <a:endParaRPr lang="en-US" sz="1450" dirty="0"/>
-          </a:p>
-        </p:txBody>
-      </p:sp>
-      <p:sp>
-        <p:nvSpPr>
-          <p:cNvPr id="14" name="Text 12"/>
-          <p:cNvSpPr/>
-          <p:nvPr/>
-        </p:nvSpPr>
-        <p:spPr>
-          <a:xfrm>
-            <a:off x="896112" y="3840480"/>
-            <a:ext cx="4773168" cy="566928"/>
-          </a:xfrm>
-          <a:prstGeom prst="rect">
-            <a:avLst/>
-          </a:prstGeom>
-          <a:noFill/>
-          <a:ln/>
-        </p:spPr>
-        <p:txBody>
-          <a:bodyPr wrap="square" rtlCol="0" anchor="ctr"/>
-          <a:lstStyle/>
-          <a:p>
-            <a:pPr indent="0" marL="0">
-              <a:lnSpc>
-                <a:spcPct val="115000"/>
-              </a:lnSpc>
-              <a:buNone/>
-            </a:pPr>
-            <a:r>
-              <a:rPr lang="en-US" sz="1150" dirty="0">
-                <a:solidFill>
-                  <a:srgbClr val="475569"/>
-                </a:solidFill>
-                <a:latin typeface="Segoe UI" pitchFamily="34" charset="0"/>
-                <a:ea typeface="Segoe UI" pitchFamily="34" charset="-122"/>
-                <a:cs typeface="Segoe UI" pitchFamily="34" charset="-120"/>
-              </a:rPr>
-              <a:t>Images are resized and compressed client-side so a full day's evidence stays lightweight to submit.</a:t>
-            </a:r>
-            <a:endParaRPr lang="en-US" sz="1150" dirty="0"/>
-          </a:p>
-        </p:txBody>
-      </p:sp>
-      <p:sp>
-        <p:nvSpPr>
-          <p:cNvPr id="15" name="Shape 13"/>
-          <p:cNvSpPr/>
-          <p:nvPr/>
-        </p:nvSpPr>
-        <p:spPr>
-          <a:xfrm>
-            <a:off x="640080" y="4617720"/>
-            <a:ext cx="82296" cy="82296"/>
-          </a:xfrm>
-          <a:prstGeom prst="rect">
-            <a:avLst/>
-          </a:prstGeom>
-          <a:solidFill>
-            <a:srgbClr val="4F46E5"/>
-          </a:solidFill>
-          <a:ln/>
-        </p:spPr>
-      </p:sp>
-      <p:sp>
-        <p:nvSpPr>
-          <p:cNvPr id="16" name="Text 14"/>
-          <p:cNvSpPr/>
-          <p:nvPr/>
-        </p:nvSpPr>
-        <p:spPr>
-          <a:xfrm>
-            <a:off x="896112" y="4480560"/>
-            <a:ext cx="4773168" cy="292608"/>
-          </a:xfrm>
-          <a:prstGeom prst="rect">
-            <a:avLst/>
-          </a:prstGeom>
-          <a:noFill/>
-          <a:ln/>
-        </p:spPr>
-        <p:txBody>
-          <a:bodyPr wrap="square" rtlCol="0" anchor="ctr"/>
-          <a:lstStyle/>
-          <a:p>
-            <a:pPr indent="0" marL="0">
-              <a:buNone/>
-            </a:pPr>
-            <a:r>
-              <a:rPr lang="en-US" sz="1450" b="1" dirty="0">
-                <a:solidFill>
-                  <a:srgbClr val="1A1A2E"/>
-                </a:solidFill>
-                <a:latin typeface="Segoe UI" pitchFamily="34" charset="0"/>
-                <a:ea typeface="Segoe UI" pitchFamily="34" charset="-122"/>
-                <a:cs typeface="Segoe UI" pitchFamily="34" charset="-120"/>
-              </a:rPr>
-              <a:t>Nothing submits until it's complete</a:t>
-            </a:r>
-            <a:endParaRPr lang="en-US" sz="1450" dirty="0"/>
-          </a:p>
-        </p:txBody>
-      </p:sp>
-      <p:sp>
-        <p:nvSpPr>
-          <p:cNvPr id="17" name="Text 15"/>
-          <p:cNvSpPr/>
-          <p:nvPr/>
-        </p:nvSpPr>
-        <p:spPr>
-          <a:xfrm>
-            <a:off x="896112" y="4773168"/>
-            <a:ext cx="4773168" cy="566928"/>
-          </a:xfrm>
-          <a:prstGeom prst="rect">
-            <a:avLst/>
-          </a:prstGeom>
-          <a:noFill/>
-          <a:ln/>
-        </p:spPr>
-        <p:txBody>
-          <a:bodyPr wrap="square" rtlCol="0" anchor="ctr"/>
-          <a:lstStyle/>
-          <a:p>
-            <a:pPr indent="0" marL="0">
-              <a:lnSpc>
-                <a:spcPct val="115000"/>
-              </a:lnSpc>
-              <a:buNone/>
-            </a:pPr>
-            <a:r>
-              <a:rPr lang="en-US" sz="1150" dirty="0">
-                <a:solidFill>
-                  <a:srgbClr val="475569"/>
-                </a:solidFill>
-                <a:latin typeface="Segoe UI" pitchFamily="34" charset="0"/>
-                <a:ea typeface="Segoe UI" pitchFamily="34" charset="-122"/>
-                <a:cs typeface="Segoe UI" pitchFamily="34" charset="-120"/>
-              </a:rPr>
-              <a:t>The Submit button validates every checked category has its minimum photos before it goes through.</a:t>
-            </a:r>
-            <a:endParaRPr lang="en-US" sz="1150" dirty="0"/>
-          </a:p>
-        </p:txBody>
-      </p:sp>
-      <p:pic>
-        <p:nvPicPr>
-          <p:cNvPr id="18" name="Image 0" descr="shots/08_dpr_photos_uploaded.png">    </p:cNvPr>
-          <p:cNvPicPr>
-            <a:picLocks noChangeAspect="1"/>
-          </p:cNvPicPr>
-          <p:nvPr/>
-        </p:nvPicPr>
-        <p:blipFill>
-          <a:blip r:embed="rId1"/>
-          <a:stretch>
-            <a:fillRect/>
-          </a:stretch>
-        </p:blipFill>
-        <p:spPr>
-          <a:xfrm>
-            <a:off x="5989320" y="1600200"/>
-            <a:ext cx="5669280" cy="4663440"/>
-          </a:xfrm>
-          <a:prstGeom prst="rect">
-            <a:avLst/>
-          </a:prstGeom>
-          <a:effectLst>
-            <a:outerShdw sx="100000" sy="100000" kx="0" ky="0" algn="bl" rotWithShape="0" blurRad="228600" dist="76200" dir="5400000">
-              <a:srgbClr val="1A1A2E">
-                <a:alpha val="35000"/>
-              </a:srgbClr>
-            </a:outerShdw>
-          </a:effectLst>
-        </p:spPr>
-      </p:pic>
-      <p:sp>
-        <p:nvSpPr>
-          <p:cNvPr id="19" name="Text 16"/>
-          <p:cNvSpPr/>
-          <p:nvPr/>
-        </p:nvSpPr>
-        <p:spPr>
-          <a:xfrm>
-            <a:off x="457200" y="6547104"/>
-            <a:ext cx="5486400" cy="274320"/>
-          </a:xfrm>
-          <a:prstGeom prst="rect">
-            <a:avLst/>
-          </a:prstGeom>
-          <a:noFill/>
-          <a:ln/>
-        </p:spPr>
-        <p:txBody>
-          <a:bodyPr wrap="square" rtlCol="0" anchor="ctr"/>
-          <a:lstStyle/>
-          <a:p>
-            <a:pPr indent="0" marL="0">
-              <a:buNone/>
-            </a:pPr>
-            <a:r>
-              <a:rPr lang="en-US" sz="900" dirty="0">
-                <a:solidFill>
-                  <a:srgbClr val="94A3B8"/>
-                </a:solidFill>
-                <a:latin typeface="Segoe UI" pitchFamily="34" charset="0"/>
-                <a:ea typeface="Segoe UI" pitchFamily="34" charset="-122"/>
-                <a:cs typeface="Segoe UI" pitchFamily="34" charset="-120"/>
-              </a:rPr>
-              <a:t>Nexora ERP  ·  DRI Dashboard Overview</a:t>
-            </a:r>
-            <a:endParaRPr lang="en-US" sz="900" dirty="0"/>
-          </a:p>
-        </p:txBody>
-      </p:sp>
-      <p:sp>
-        <p:nvSpPr>
-          <p:cNvPr id="20" name="Text 17"/>
-          <p:cNvSpPr/>
-          <p:nvPr/>
-        </p:nvSpPr>
-        <p:spPr>
-          <a:xfrm>
-            <a:off x="11521440" y="6547104"/>
-            <a:ext cx="365760" cy="274320"/>
-          </a:xfrm>
-          <a:prstGeom prst="rect">
-            <a:avLst/>
-          </a:prstGeom>
-          <a:noFill/>
-          <a:ln/>
-        </p:spPr>
-        <p:txBody>
-          <a:bodyPr wrap="square" rtlCol="0" anchor="ctr"/>
-          <a:lstStyle/>
-          <a:p>
-            <a:pPr algn="r" indent="0" marL="0">
-              <a:buNone/>
-            </a:pPr>
-            <a:r>
-              <a:rPr lang="en-US" sz="900" dirty="0">
-                <a:solidFill>
-                  <a:srgbClr val="94A3B8"/>
-                </a:solidFill>
-                <a:latin typeface="Segoe UI" pitchFamily="34" charset="0"/>
-                <a:ea typeface="Segoe UI" pitchFamily="34" charset="-122"/>
-                <a:cs typeface="Segoe UI" pitchFamily="34" charset="-120"/>
-              </a:rPr>
-              <a:t>8</a:t>
-            </a:r>
-            <a:endParaRPr lang="en-US" sz="900" dirty="0"/>
+              <a:t>Raise it in seconds on site — track it through AGM, GM, and Planning until it's resolved.</a:t>
+            </a:r>
+            <a:endParaRPr lang="en-US" sz="1500" dirty="0"/>
           </a:p>
         </p:txBody>
       </p:sp>
@@ -8538,7 +7184,7 @@
             <a:avLst/>
           </a:prstGeom>
           <a:solidFill>
-            <a:srgbClr val="4F46E5"/>
+            <a:srgbClr val="7C3AED"/>
           </a:solidFill>
           <a:ln/>
         </p:spPr>
@@ -8596,7 +7242,7 @@
                 <a:ea typeface="Segoe UI" pitchFamily="34" charset="-122"/>
                 <a:cs typeface="Segoe UI" pitchFamily="34" charset="-120"/>
               </a:rPr>
-              <a:t>Reviewing a Submitted Report</a:t>
+              <a:t>Raising a Request</a:t>
             </a:r>
             <a:endParaRPr lang="en-US" sz="2400" dirty="0"/>
           </a:p>
@@ -8637,7 +7283,7 @@
                 <a:ea typeface="Segoe UI" pitchFamily="34" charset="-122"/>
                 <a:cs typeface="Segoe UI" pitchFamily="34" charset="-120"/>
               </a:rPr>
-              <a:t>Every category's photo evidence stays attached to the report, viewable any time.</a:t>
+              <a:t>A DRI stuck without a drawing raises a ticket without ever leaving the Daily Progress Report page.</a:t>
             </a:r>
             <a:endParaRPr lang="en-US" sz="1250" dirty="0"/>
           </a:p>
@@ -8658,7 +7304,7 @@
             <a:avLst/>
           </a:prstGeom>
           <a:solidFill>
-            <a:srgbClr val="4F46E5"/>
+            <a:srgbClr val="7C3AED"/>
           </a:solidFill>
           <a:ln/>
         </p:spPr>
@@ -8696,7 +7342,7 @@
                 <a:ea typeface="Segoe UI" pitchFamily="34" charset="-122"/>
                 <a:cs typeface="Segoe UI" pitchFamily="34" charset="-120"/>
               </a:rPr>
-              <a:t>Full report summary</a:t>
+              <a:t>One button, right where it's needed</a:t>
             </a:r>
             <a:endParaRPr lang="en-US" sz="1450" dirty="0"/>
           </a:p>
@@ -8738,7 +7384,7 @@
                 <a:ea typeface="Segoe UI" pitchFamily="34" charset="-122"/>
                 <a:cs typeface="Segoe UI" pitchFamily="34" charset="-120"/>
               </a:rPr>
-              <a:t>Date, DRI, contractor, shift, and labour count are all shown together at the top.</a:t>
+              <a:t>"Drawing Request" sits next to "New Report" on the Daily Progress Report page.</a:t>
             </a:r>
             <a:endParaRPr lang="en-US" sz="1150" dirty="0"/>
           </a:p>
@@ -8759,7 +7405,7 @@
             <a:avLst/>
           </a:prstGeom>
           <a:solidFill>
-            <a:srgbClr val="4F46E5"/>
+            <a:srgbClr val="7C3AED"/>
           </a:solidFill>
           <a:ln/>
         </p:spPr>
@@ -8797,7 +7443,7 @@
                 <a:ea typeface="Segoe UI" pitchFamily="34" charset="-122"/>
                 <a:cs typeface="Segoe UI" pitchFamily="34" charset="-120"/>
               </a:rPr>
-              <a:t>Photo evidence, per category</a:t>
+              <a:t>Just the essentials</a:t>
             </a:r>
             <a:endParaRPr lang="en-US" sz="1450" dirty="0"/>
           </a:p>
@@ -8839,7 +7485,7 @@
                 <a:ea typeface="Segoe UI" pitchFamily="34" charset="-122"/>
                 <a:cs typeface="Segoe UI" pitchFamily="34" charset="-120"/>
               </a:rPr>
-              <a:t>Each checked work type keeps its own gallery of site photos — click through to open full size.</a:t>
+              <a:t>Project, a description of what's needed, drawing type (Architectural / Structural / MEP / Civil…), and requester name.</a:t>
             </a:r>
             <a:endParaRPr lang="en-US" sz="1150" dirty="0"/>
           </a:p>
@@ -8860,7 +7506,7 @@
             <a:avLst/>
           </a:prstGeom>
           <a:solidFill>
-            <a:srgbClr val="4F46E5"/>
+            <a:srgbClr val="7C3AED"/>
           </a:solidFill>
           <a:ln/>
         </p:spPr>
@@ -8898,7 +7544,7 @@
                 <a:ea typeface="Segoe UI" pitchFamily="34" charset="-122"/>
                 <a:cs typeface="Segoe UI" pitchFamily="34" charset="-120"/>
               </a:rPr>
-              <a:t>A permanent, auditable record</a:t>
+              <a:t>Auto-numbered on submit</a:t>
             </a:r>
             <a:endParaRPr lang="en-US" sz="1450" dirty="0"/>
           </a:p>
@@ -8940,7 +7586,108 @@
                 <a:ea typeface="Segoe UI" pitchFamily="34" charset="-122"/>
                 <a:cs typeface="Segoe UI" pitchFamily="34" charset="-120"/>
               </a:rPr>
-              <a:t>Once submitted, the report and its photos become part of that project's history.</a:t>
+              <a:t>Every request gets its own ticket number (e.g. DR-0003) the moment it's raised.</a:t>
+            </a:r>
+            <a:endParaRPr lang="en-US" sz="1150" dirty="0"/>
+          </a:p>
+        </p:txBody>
+      </p:sp>
+      <p:sp>
+        <p:nvSpPr>
+          <p:cNvPr id="15" name="Shape 13"/>
+          <p:cNvSpPr/>
+          <p:nvPr/>
+        </p:nvSpPr>
+        <p:spPr>
+          <a:xfrm>
+            <a:off x="640080" y="4617720"/>
+            <a:ext cx="82296" cy="82296"/>
+          </a:xfrm>
+          <a:prstGeom prst="rect">
+            <a:avLst/>
+          </a:prstGeom>
+          <a:solidFill>
+            <a:srgbClr val="7C3AED"/>
+          </a:solidFill>
+          <a:ln/>
+        </p:spPr>
+      </p:sp>
+      <p:sp>
+        <p:nvSpPr>
+          <p:cNvPr id="16" name="Text 14"/>
+          <p:cNvSpPr/>
+          <p:nvPr/>
+        </p:nvSpPr>
+        <p:spPr>
+          <a:xfrm>
+            <a:off x="896112" y="4480560"/>
+            <a:ext cx="4773168" cy="292608"/>
+          </a:xfrm>
+          <a:prstGeom prst="rect">
+            <a:avLst/>
+          </a:prstGeom>
+          <a:noFill/>
+          <a:ln/>
+        </p:spPr>
+        <p:txBody>
+          <a:bodyPr wrap="square" rtlCol="0" anchor="ctr"/>
+          <a:lstStyle/>
+          <a:p>
+            <a:pPr indent="0" marL="0">
+              <a:buNone/>
+            </a:pPr>
+            <a:r>
+              <a:rPr lang="en-US" sz="1450" b="1" dirty="0">
+                <a:solidFill>
+                  <a:srgbClr val="1A1A2E"/>
+                </a:solidFill>
+                <a:latin typeface="Segoe UI" pitchFamily="34" charset="0"/>
+                <a:ea typeface="Segoe UI" pitchFamily="34" charset="-122"/>
+                <a:cs typeface="Segoe UI" pitchFamily="34" charset="-120"/>
+              </a:rPr>
+              <a:t>Also available publicly</a:t>
+            </a:r>
+            <a:endParaRPr lang="en-US" sz="1450" dirty="0"/>
+          </a:p>
+        </p:txBody>
+      </p:sp>
+      <p:sp>
+        <p:nvSpPr>
+          <p:cNvPr id="17" name="Text 15"/>
+          <p:cNvSpPr/>
+          <p:nvPr/>
+        </p:nvSpPr>
+        <p:spPr>
+          <a:xfrm>
+            <a:off x="896112" y="4773168"/>
+            <a:ext cx="4773168" cy="566928"/>
+          </a:xfrm>
+          <a:prstGeom prst="rect">
+            <a:avLst/>
+          </a:prstGeom>
+          <a:noFill/>
+          <a:ln/>
+        </p:spPr>
+        <p:txBody>
+          <a:bodyPr wrap="square" rtlCol="0" anchor="ctr"/>
+          <a:lstStyle/>
+          <a:p>
+            <a:pPr indent="0" marL="0">
+              <a:lnSpc>
+                <a:spcPct val="115000"/>
+              </a:lnSpc>
+              <a:buNone/>
+            </a:pPr>
+            <a:r>
+              <a:rPr lang="en-US" sz="1150" dirty="0">
+                <a:solidFill>
+                  <a:srgbClr val="475569"/>
+                </a:solidFill>
+                <a:latin typeface="Segoe UI" pitchFamily="34" charset="0"/>
+                <a:ea typeface="Segoe UI" pitchFamily="34" charset="-122"/>
+                <a:cs typeface="Segoe UI" pitchFamily="34" charset="-120"/>
+              </a:rPr>
+              <a:t>A standalone no-login form covers anyone on site without an account.</a:t>
             </a:r>
             <a:endParaRPr lang="en-US" sz="1150" dirty="0"/>
           </a:p>
@@ -8948,7 +7695,7 @@
       </p:sp>
       <p:pic>
         <p:nvPicPr>
-          <p:cNvPr id="15" name="Image 0" descr="shots/10_dpr_view_detail.png">    </p:cNvPr>
+          <p:cNvPr id="18" name="Image 0" descr="shots/12_drawing_request_filled.png">    </p:cNvPr>
           <p:cNvPicPr>
             <a:picLocks noChangeAspect="1"/>
           </p:cNvPicPr>
@@ -8979,7 +7726,7 @@
       </p:pic>
       <p:sp>
         <p:nvSpPr>
-          <p:cNvPr id="16" name="Text 13"/>
+          <p:cNvPr id="19" name="Text 16"/>
           <p:cNvSpPr/>
           <p:nvPr/>
         </p:nvSpPr>
@@ -9018,7 +7765,7 @@
       </p:sp>
       <p:sp>
         <p:nvSpPr>
-          <p:cNvPr id="17" name="Text 14"/>
+          <p:cNvPr id="20" name="Text 17"/>
           <p:cNvSpPr/>
           <p:nvPr/>
         </p:nvSpPr>
@@ -9049,7 +7796,7 @@
                 <a:ea typeface="Segoe UI" pitchFamily="34" charset="-122"/>
                 <a:cs typeface="Segoe UI" pitchFamily="34" charset="-120"/>
               </a:rPr>
-              <a:t>9</a:t>
+              <a:t>7</a:t>
             </a:r>
             <a:endParaRPr lang="en-US" sz="900" dirty="0"/>
           </a:p>
